--- a/dev/deck/Loan_Default_Prediction_Seminar.pptx
+++ b/dev/deck/Loan_Default_Prediction_Seminar.pptx
@@ -5,13 +5,13 @@
     <p:sldMasterId id="2147483648" r:id="rId1"/>
   </p:sldMasterIdLst>
   <p:notesMasterIdLst>
-    <p:notesMasterId r:id="rId6"/>
+    <p:notesMasterId r:id="rId20"/>
   </p:notesMasterIdLst>
   <p:sldIdLst>
     <p:sldId id="271" r:id="rId2"/>
-    <p:sldId id="272" r:id="rId3"/>
-    <p:sldId id="273" r:id="rId4"/>
-    <p:sldId id="274" r:id="rId5"/>
+    <p:sldId id="272" r:id="rId8"/>
+    <p:sldId id="273" r:id="rId9"/>
+    <p:sldId id="274" r:id="rId10"/>
   </p:sldIdLst>
   <p:sldSz cx="12192000" cy="6858000"/>
   <p:notesSz cx="6858000" cy="9144000"/>
@@ -129,57 +129,15 @@
 </p:presentation>
 </file>
 
-<file path=ppt/changesInfos/changesInfo1.xml><?xml version="1.0" encoding="utf-8"?>
-<pc:chgInfo xmlns:a="http://schemas.openxmlformats.org/drawingml/2006/main" xmlns:r="http://schemas.openxmlformats.org/officeDocument/2006/relationships" xmlns:ac="http://schemas.microsoft.com/office/drawing/2013/main/command" xmlns:pc="http://schemas.microsoft.com/office/powerpoint/2013/main/command">
-  <pc:docChgLst>
-    <pc:chgData name="Prasad Bhalerao" userId="fe1392aba35d8056" providerId="LiveId" clId="{2A9320A3-695D-43CA-BC95-A12F93437CE2}"/>
-    <pc:docChg chg="modSld">
-      <pc:chgData name="Prasad Bhalerao" userId="fe1392aba35d8056" providerId="LiveId" clId="{2A9320A3-695D-43CA-BC95-A12F93437CE2}" dt="2026-10-14T03:14:59.156" v="1" actId="1076"/>
-      <pc:docMkLst>
-        <pc:docMk/>
-      </pc:docMkLst>
-      <pc:sldChg chg="modSp mod">
-        <pc:chgData name="Prasad Bhalerao" userId="fe1392aba35d8056" providerId="LiveId" clId="{2A9320A3-695D-43CA-BC95-A12F93437CE2}" dt="2026-10-14T03:14:59.156" v="1" actId="1076"/>
-        <pc:sldMkLst>
-          <pc:docMk/>
-          <pc:sldMk cId="3602338430" sldId="271"/>
-        </pc:sldMkLst>
-        <pc:spChg chg="mod">
-          <ac:chgData name="Prasad Bhalerao" userId="fe1392aba35d8056" providerId="LiveId" clId="{2A9320A3-695D-43CA-BC95-A12F93437CE2}" dt="2026-10-14T03:14:59.156" v="1" actId="1076"/>
-          <ac:spMkLst>
-            <pc:docMk/>
-            <pc:sldMk cId="3602338430" sldId="271"/>
-            <ac:spMk id="21" creationId="{51C74F7D-56E3-4E55-95F0-C0D8C8C11BE8}"/>
-          </ac:spMkLst>
-        </pc:spChg>
-        <pc:spChg chg="mod">
-          <ac:chgData name="Prasad Bhalerao" userId="fe1392aba35d8056" providerId="LiveId" clId="{2A9320A3-695D-43CA-BC95-A12F93437CE2}" dt="2026-10-14T03:14:54.751" v="0" actId="1076"/>
-          <ac:spMkLst>
-            <pc:docMk/>
-            <pc:sldMk cId="3602338430" sldId="271"/>
-            <ac:spMk id="25" creationId="{A1429130-40B3-459E-8B41-60933F69369B}"/>
-          </ac:spMkLst>
-        </pc:spChg>
-      </pc:sldChg>
-    </pc:docChg>
-  </pc:docChgLst>
-</pc:chgInfo>
-</file>
-
 <file path=ppt/charts/chart1.xml><?xml version="1.0" encoding="utf-8"?>
-<c:chartSpace xmlns:c="http://schemas.openxmlformats.org/drawingml/2006/chart" xmlns:a="http://schemas.openxmlformats.org/drawingml/2006/main" xmlns:r="http://schemas.openxmlformats.org/officeDocument/2006/relationships" xmlns:c16r2="http://schemas.microsoft.com/office/drawing/2015/06/chart">
+<c:chartSpace xmlns:c="http://schemas.openxmlformats.org/drawingml/2006/chart" xmlns:a="http://schemas.openxmlformats.org/drawingml/2006/main" xmlns:r="http://schemas.openxmlformats.org/officeDocument/2006/relationships">
   <c:date1904 val="0"/>
-  <c:lang val="en-US"/>
-  <c:roundedCorners val="1"/>
-  <c:style val="2"/>
   <c:chart>
     <c:autoTitleDeleted val="1"/>
     <c:plotArea>
-      <c:layout/>
       <c:barChart>
         <c:barDir val="bar"/>
         <c:grouping val="clustered"/>
-        <c:varyColors val="1"/>
         <c:ser>
           <c:idx val="0"/>
           <c:order val="0"/>
@@ -194,47 +152,35 @@
               </c:strCache>
             </c:strRef>
           </c:tx>
-          <c:invertIfNegative val="1"/>
           <c:dPt>
             <c:idx val="0"/>
-            <c:invertIfNegative val="1"/>
-            <c:bubble3D val="0"/>
             <c:spPr>
               <a:solidFill>
                 <a:srgbClr val="B5483F"/>
               </a:solidFill>
             </c:spPr>
-            <c:extLst>
-              <c:ext xmlns:c16="http://schemas.microsoft.com/office/drawing/2014/chart" uri="{C3380CC4-5D6E-409C-BE32-E72D297353CC}">
-                <c16:uniqueId val="{00000001-3BA9-4D64-8590-315DDD5359B7}"/>
-              </c:ext>
-            </c:extLst>
           </c:dPt>
           <c:dPt>
             <c:idx val="1"/>
-            <c:invertIfNegative val="1"/>
-            <c:bubble3D val="0"/>
             <c:spPr>
               <a:solidFill>
                 <a:srgbClr val="2F5D8C"/>
               </a:solidFill>
             </c:spPr>
-            <c:extLst>
-              <c:ext xmlns:c16="http://schemas.microsoft.com/office/drawing/2014/chart" uri="{C3380CC4-5D6E-409C-BE32-E72D297353CC}">
-                <c16:uniqueId val="{00000003-3BA9-4D64-8590-315DDD5359B7}"/>
-              </c:ext>
-            </c:extLst>
           </c:dPt>
           <c:dLbls>
             <c:dLbl>
               <c:idx val="0"/>
               <c:tx>
                 <c:rich>
-                  <a:bodyPr/>
+                  <a:bodyPr wrap="square" anchor="t" lIns="0" tIns="0" rIns="0" bIns="0"/>
                   <a:lstStyle/>
                   <a:p>
+                    <a:pPr algn="l">
+                      <a:defRPr/>
+                    </a:pPr>
                     <a:r>
-                      <a:rPr lang="en-IN" sz="1300" b="1" i="0">
+                      <a:rPr sz="1300" b="1" i="0">
                         <a:solidFill>
                           <a:srgbClr val="1A1A1A"/>
                         </a:solidFill>
@@ -251,24 +197,19 @@
               <c:showSerName val="0"/>
               <c:showPercent val="0"/>
               <c:showBubbleSize val="0"/>
-              <c:extLst>
-                <c:ext xmlns:c15="http://schemas.microsoft.com/office/drawing/2012/chart" uri="{CE6537A1-D6FC-4f65-9D91-7224C49458BB}">
-                  <c15:showDataLabelsRange val="0"/>
-                </c:ext>
-                <c:ext xmlns:c16="http://schemas.microsoft.com/office/drawing/2014/chart" uri="{C3380CC4-5D6E-409C-BE32-E72D297353CC}">
-                  <c16:uniqueId val="{00000001-3BA9-4D64-8590-315DDD5359B7}"/>
-                </c:ext>
-              </c:extLst>
             </c:dLbl>
             <c:dLbl>
               <c:idx val="1"/>
               <c:tx>
                 <c:rich>
-                  <a:bodyPr/>
+                  <a:bodyPr wrap="square" anchor="t" lIns="0" tIns="0" rIns="0" bIns="0"/>
                   <a:lstStyle/>
                   <a:p>
+                    <a:pPr algn="l">
+                      <a:defRPr/>
+                    </a:pPr>
                     <a:r>
-                      <a:rPr lang="en-IN" sz="1300" b="1" i="0">
+                      <a:rPr sz="1300" b="1" i="0">
                         <a:solidFill>
                           <a:srgbClr val="1A1A1A"/>
                         </a:solidFill>
@@ -285,33 +226,14 @@
               <c:showSerName val="0"/>
               <c:showPercent val="0"/>
               <c:showBubbleSize val="0"/>
-              <c:extLst>
-                <c:ext xmlns:c15="http://schemas.microsoft.com/office/drawing/2012/chart" uri="{CE6537A1-D6FC-4f65-9D91-7224C49458BB}">
-                  <c15:showDataLabelsRange val="0"/>
-                </c:ext>
-                <c:ext xmlns:c16="http://schemas.microsoft.com/office/drawing/2014/chart" uri="{C3380CC4-5D6E-409C-BE32-E72D297353CC}">
-                  <c16:uniqueId val="{00000003-3BA9-4D64-8590-315DDD5359B7}"/>
-                </c:ext>
-              </c:extLst>
             </c:dLbl>
-            <c:spPr>
-              <a:noFill/>
-              <a:ln>
-                <a:noFill/>
-              </a:ln>
-              <a:effectLst/>
-            </c:spPr>
             <c:showLegendKey val="0"/>
             <c:showVal val="0"/>
             <c:showCatName val="0"/>
             <c:showSerName val="0"/>
             <c:showPercent val="0"/>
             <c:showBubbleSize val="0"/>
-            <c:extLst>
-              <c:ext xmlns:c15="http://schemas.microsoft.com/office/drawing/2012/chart" uri="{CE6537A1-D6FC-4f65-9D91-7224C49458BB}">
-                <c15:showLeaderLines val="0"/>
-              </c:ext>
-            </c:extLst>
+            <c:showLeaderLines val="1"/>
           </c:dLbls>
           <c:cat>
             <c:strRef>
@@ -342,13 +264,17 @@
               </c:numCache>
             </c:numRef>
           </c:val>
-          <c:extLst>
-            <c:ext xmlns:c16="http://schemas.microsoft.com/office/drawing/2014/chart" uri="{C3380CC4-5D6E-409C-BE32-E72D297353CC}">
-              <c16:uniqueId val="{00000004-3BA9-4D64-8590-315DDD5359B7}"/>
-            </c:ext>
-          </c:extLst>
         </c:ser>
         <c:dLbls>
+          <c:txPr>
+            <a:bodyPr/>
+            <a:lstStyle/>
+            <a:p>
+              <a:pPr>
+                <a:defRPr sz="1300" b="1"/>
+              </a:pPr>
+            </a:p>
+          </c:txPr>
           <c:dLblPos val="outEnd"/>
           <c:showLegendKey val="0"/>
           <c:showVal val="1"/>
@@ -356,6 +282,7 @@
           <c:showSerName val="0"/>
           <c:showPercent val="0"/>
           <c:showBubbleSize val="0"/>
+          <c:showLeaderLines val="1"/>
         </c:dLbls>
         <c:gapWidth val="45"/>
         <c:axId val="-2068027336"/>
@@ -368,7 +295,6 @@
         </c:scaling>
         <c:delete val="0"/>
         <c:axPos val="l"/>
-        <c:numFmt formatCode="General" sourceLinked="0"/>
         <c:majorTickMark val="out"/>
         <c:minorTickMark val="none"/>
         <c:tickLblPos val="nextTo"/>
@@ -386,7 +312,6 @@
             <a:pPr>
               <a:defRPr sz="1300"/>
             </a:pPr>
-            <a:endParaRPr lang="en-US"/>
           </a:p>
         </c:txPr>
         <c:crossAx val="-2113994440"/>
@@ -399,24 +324,19 @@
       <c:valAx>
         <c:axId val="-2113994440"/>
         <c:scaling>
-          <c:orientation val="minMax"/>
-          <c:max val="175000"/>
-          <c:min val="0"/>
+          <c:max val="175000.0"/>
+          <c:min val="0.0"/>
         </c:scaling>
-        <c:delete val="1"/>
+        <c:delete/>
         <c:axPos val="b"/>
-        <c:numFmt formatCode="General" sourceLinked="1"/>
         <c:majorTickMark val="out"/>
         <c:minorTickMark val="none"/>
         <c:tickLblPos val="nextTo"/>
         <c:crossAx val="-2068027336"/>
         <c:crosses val="autoZero"/>
-        <c:crossBetween val="between"/>
       </c:valAx>
     </c:plotArea>
-    <c:plotVisOnly val="1"/>
     <c:dispBlanksAs val="gap"/>
-    <c:showDLblsOverMax val="1"/>
   </c:chart>
   <c:txPr>
     <a:bodyPr/>
@@ -440,19 +360,14 @@
 </file>
 
 <file path=ppt/charts/chart2.xml><?xml version="1.0" encoding="utf-8"?>
-<c:chartSpace xmlns:c="http://schemas.openxmlformats.org/drawingml/2006/chart" xmlns:a="http://schemas.openxmlformats.org/drawingml/2006/main" xmlns:r="http://schemas.openxmlformats.org/officeDocument/2006/relationships" xmlns:c16r2="http://schemas.microsoft.com/office/drawing/2015/06/chart">
+<c:chartSpace xmlns:c="http://schemas.openxmlformats.org/drawingml/2006/chart" xmlns:a="http://schemas.openxmlformats.org/drawingml/2006/main" xmlns:r="http://schemas.openxmlformats.org/officeDocument/2006/relationships">
   <c:date1904 val="0"/>
-  <c:lang val="en-US"/>
-  <c:roundedCorners val="1"/>
-  <c:style val="2"/>
   <c:chart>
     <c:autoTitleDeleted val="1"/>
     <c:plotArea>
-      <c:layout/>
       <c:barChart>
         <c:barDir val="bar"/>
         <c:grouping val="clustered"/>
-        <c:varyColors val="1"/>
         <c:ser>
           <c:idx val="0"/>
           <c:order val="0"/>
@@ -467,175 +382,78 @@
               </c:strCache>
             </c:strRef>
           </c:tx>
-          <c:invertIfNegative val="1"/>
           <c:dPt>
             <c:idx val="0"/>
-            <c:invertIfNegative val="1"/>
-            <c:bubble3D val="0"/>
             <c:spPr>
               <a:solidFill>
                 <a:srgbClr val="2F5D8C"/>
               </a:solidFill>
             </c:spPr>
-            <c:extLst>
-              <c:ext xmlns:c16="http://schemas.microsoft.com/office/drawing/2014/chart" uri="{C3380CC4-5D6E-409C-BE32-E72D297353CC}">
-                <c16:uniqueId val="{00000001-FA9F-4B53-967B-2F3CC8CDE29D}"/>
-              </c:ext>
-            </c:extLst>
           </c:dPt>
           <c:dPt>
             <c:idx val="1"/>
-            <c:invertIfNegative val="1"/>
-            <c:bubble3D val="0"/>
             <c:spPr>
               <a:solidFill>
                 <a:srgbClr val="2F5D8C"/>
               </a:solidFill>
             </c:spPr>
-            <c:extLst>
-              <c:ext xmlns:c16="http://schemas.microsoft.com/office/drawing/2014/chart" uri="{C3380CC4-5D6E-409C-BE32-E72D297353CC}">
-                <c16:uniqueId val="{00000003-FA9F-4B53-967B-2F3CC8CDE29D}"/>
-              </c:ext>
-            </c:extLst>
           </c:dPt>
           <c:dPt>
             <c:idx val="2"/>
-            <c:invertIfNegative val="1"/>
-            <c:bubble3D val="0"/>
             <c:spPr>
               <a:solidFill>
                 <a:srgbClr val="2F5D8C"/>
               </a:solidFill>
             </c:spPr>
-            <c:extLst>
-              <c:ext xmlns:c16="http://schemas.microsoft.com/office/drawing/2014/chart" uri="{C3380CC4-5D6E-409C-BE32-E72D297353CC}">
-                <c16:uniqueId val="{00000005-FA9F-4B53-967B-2F3CC8CDE29D}"/>
-              </c:ext>
-            </c:extLst>
           </c:dPt>
           <c:dPt>
             <c:idx val="3"/>
-            <c:invertIfNegative val="1"/>
-            <c:bubble3D val="0"/>
             <c:spPr>
               <a:solidFill>
                 <a:srgbClr val="2F5D8C"/>
               </a:solidFill>
             </c:spPr>
-            <c:extLst>
-              <c:ext xmlns:c16="http://schemas.microsoft.com/office/drawing/2014/chart" uri="{C3380CC4-5D6E-409C-BE32-E72D297353CC}">
-                <c16:uniqueId val="{00000007-FA9F-4B53-967B-2F3CC8CDE29D}"/>
-              </c:ext>
-            </c:extLst>
           </c:dPt>
           <c:dPt>
             <c:idx val="4"/>
-            <c:invertIfNegative val="1"/>
-            <c:bubble3D val="0"/>
             <c:spPr>
               <a:solidFill>
                 <a:srgbClr val="2F5D8C"/>
               </a:solidFill>
             </c:spPr>
-            <c:extLst>
-              <c:ext xmlns:c16="http://schemas.microsoft.com/office/drawing/2014/chart" uri="{C3380CC4-5D6E-409C-BE32-E72D297353CC}">
-                <c16:uniqueId val="{00000009-FA9F-4B53-967B-2F3CC8CDE29D}"/>
-              </c:ext>
-            </c:extLst>
           </c:dPt>
           <c:dPt>
             <c:idx val="5"/>
-            <c:invertIfNegative val="1"/>
-            <c:bubble3D val="0"/>
             <c:spPr>
               <a:solidFill>
                 <a:srgbClr val="B5483F"/>
               </a:solidFill>
             </c:spPr>
-            <c:extLst>
-              <c:ext xmlns:c16="http://schemas.microsoft.com/office/drawing/2014/chart" uri="{C3380CC4-5D6E-409C-BE32-E72D297353CC}">
-                <c16:uniqueId val="{0000000B-FA9F-4B53-967B-2F3CC8CDE29D}"/>
-              </c:ext>
-            </c:extLst>
           </c:dPt>
           <c:dPt>
             <c:idx val="6"/>
-            <c:invertIfNegative val="1"/>
-            <c:bubble3D val="0"/>
             <c:spPr>
               <a:solidFill>
                 <a:srgbClr val="B5483F"/>
               </a:solidFill>
             </c:spPr>
-            <c:extLst>
-              <c:ext xmlns:c16="http://schemas.microsoft.com/office/drawing/2014/chart" uri="{C3380CC4-5D6E-409C-BE32-E72D297353CC}">
-                <c16:uniqueId val="{0000000D-FA9F-4B53-967B-2F3CC8CDE29D}"/>
-              </c:ext>
-            </c:extLst>
           </c:dPt>
           <c:dPt>
             <c:idx val="7"/>
-            <c:invertIfNegative val="1"/>
-            <c:bubble3D val="0"/>
             <c:spPr>
               <a:solidFill>
                 <a:srgbClr val="2F5D8C"/>
               </a:solidFill>
             </c:spPr>
-            <c:extLst>
-              <c:ext xmlns:c16="http://schemas.microsoft.com/office/drawing/2014/chart" uri="{C3380CC4-5D6E-409C-BE32-E72D297353CC}">
-                <c16:uniqueId val="{0000000F-FA9F-4B53-967B-2F3CC8CDE29D}"/>
-              </c:ext>
-            </c:extLst>
           </c:dPt>
           <c:dPt>
             <c:idx val="8"/>
-            <c:invertIfNegative val="1"/>
-            <c:bubble3D val="0"/>
             <c:spPr>
               <a:solidFill>
                 <a:srgbClr val="B5483F"/>
               </a:solidFill>
             </c:spPr>
-            <c:extLst>
-              <c:ext xmlns:c16="http://schemas.microsoft.com/office/drawing/2014/chart" uri="{C3380CC4-5D6E-409C-BE32-E72D297353CC}">
-                <c16:uniqueId val="{00000011-FA9F-4B53-967B-2F3CC8CDE29D}"/>
-              </c:ext>
-            </c:extLst>
           </c:dPt>
-          <c:dLbls>
-            <c:numFmt formatCode="0.000" sourceLinked="0"/>
-            <c:spPr>
-              <a:noFill/>
-              <a:ln>
-                <a:noFill/>
-              </a:ln>
-              <a:effectLst/>
-            </c:spPr>
-            <c:txPr>
-              <a:bodyPr/>
-              <a:lstStyle/>
-              <a:p>
-                <a:pPr>
-                  <a:defRPr sz="1100"/>
-                </a:pPr>
-                <a:endParaRPr lang="en-US"/>
-              </a:p>
-            </c:txPr>
-            <c:dLblPos val="outEnd"/>
-            <c:showLegendKey val="0"/>
-            <c:showVal val="1"/>
-            <c:showCatName val="0"/>
-            <c:showSerName val="0"/>
-            <c:showPercent val="0"/>
-            <c:showBubbleSize val="0"/>
-            <c:showLeaderLines val="0"/>
-            <c:extLst>
-              <c:ext xmlns:c15="http://schemas.microsoft.com/office/drawing/2012/chart" uri="{CE6537A1-D6FC-4f65-9D91-7224C49458BB}">
-                <c15:showLeaderLines val="0"/>
-              </c:ext>
-            </c:extLst>
-          </c:dLbls>
           <c:cat>
             <c:strRef>
               <c:f>Sheet1!$A$2:$A$10</c:f>
@@ -657,10 +475,10 @@
                   <c:v>Debt ratio</c:v>
                 </c:pt>
                 <c:pt idx="5">
-                  <c:v>30â€“59 days late</c:v>
+                  <c:v>30–59 days late</c:v>
                 </c:pt>
                 <c:pt idx="6">
-                  <c:v>60â€“89 days late</c:v>
+                  <c:v>60–89 days late</c:v>
                 </c:pt>
                 <c:pt idx="7">
                   <c:v>Credit utilisation</c:v>
@@ -678,19 +496,19 @@
                 <c:formatCode>General</c:formatCode>
                 <c:ptCount val="9"/>
                 <c:pt idx="0">
-                  <c:v>5.3916900640812893E-2</c:v>
+                  <c:v>0.05391690064081289</c:v>
                 </c:pt>
                 <c:pt idx="1">
-                  <c:v>4.4758186999001894E-2</c:v>
+                  <c:v>0.044758186999001894</c:v>
                 </c:pt>
                 <c:pt idx="2">
-                  <c:v>5.3750459393496847E-2</c:v>
+                  <c:v>0.05375045939349685</c:v>
                 </c:pt>
                 <c:pt idx="3">
-                  <c:v>5.8093672853690916E-2</c:v>
+                  <c:v>0.058093672853690916</c:v>
                 </c:pt>
                 <c:pt idx="4">
-                  <c:v>6.8822466774427618E-2</c:v>
+                  <c:v>0.06882246677442762</c:v>
                 </c:pt>
                 <c:pt idx="5">
                   <c:v>0.10963982284892343</c:v>
@@ -707,13 +525,18 @@
               </c:numCache>
             </c:numRef>
           </c:val>
-          <c:extLst>
-            <c:ext xmlns:c16="http://schemas.microsoft.com/office/drawing/2014/chart" uri="{C3380CC4-5D6E-409C-BE32-E72D297353CC}">
-              <c16:uniqueId val="{00000012-FA9F-4B53-967B-2F3CC8CDE29D}"/>
-            </c:ext>
-          </c:extLst>
         </c:ser>
         <c:dLbls>
+          <c:numFmt formatCode="0.000" sourceLinked="0"/>
+          <c:txPr>
+            <a:bodyPr/>
+            <a:lstStyle/>
+            <a:p>
+              <a:pPr>
+                <a:defRPr sz="1100"/>
+              </a:pPr>
+            </a:p>
+          </c:txPr>
           <c:dLblPos val="outEnd"/>
           <c:showLegendKey val="0"/>
           <c:showVal val="1"/>
@@ -721,6 +544,7 @@
           <c:showSerName val="0"/>
           <c:showPercent val="0"/>
           <c:showBubbleSize val="0"/>
+          <c:showLeaderLines val="1"/>
         </c:dLbls>
         <c:gapWidth val="40"/>
         <c:axId val="-2068027336"/>
@@ -733,7 +557,6 @@
         </c:scaling>
         <c:delete val="0"/>
         <c:axPos val="l"/>
-        <c:numFmt formatCode="General" sourceLinked="0"/>
         <c:majorTickMark val="out"/>
         <c:minorTickMark val="none"/>
         <c:tickLblPos val="nextTo"/>
@@ -751,7 +574,6 @@
             <a:pPr>
               <a:defRPr sz="1150"/>
             </a:pPr>
-            <a:endParaRPr lang="en-US"/>
           </a:p>
         </c:txPr>
         <c:crossAx val="-2113994440"/>
@@ -764,24 +586,19 @@
       <c:valAx>
         <c:axId val="-2113994440"/>
         <c:scaling>
-          <c:orientation val="minMax"/>
-          <c:max val="0.32603422406308169"/>
-          <c:min val="0"/>
+          <c:max val="0.3260342240630817"/>
+          <c:min val="0.0"/>
         </c:scaling>
-        <c:delete val="1"/>
+        <c:delete/>
         <c:axPos val="b"/>
-        <c:numFmt formatCode="General" sourceLinked="1"/>
         <c:majorTickMark val="out"/>
         <c:minorTickMark val="none"/>
         <c:tickLblPos val="nextTo"/>
         <c:crossAx val="-2068027336"/>
         <c:crosses val="autoZero"/>
-        <c:crossBetween val="between"/>
       </c:valAx>
     </c:plotArea>
-    <c:plotVisOnly val="1"/>
     <c:dispBlanksAs val="gap"/>
-    <c:showDLblsOverMax val="1"/>
   </c:chart>
   <c:txPr>
     <a:bodyPr/>
@@ -805,15 +622,10 @@
 </file>
 
 <file path=ppt/charts/chart3.xml><?xml version="1.0" encoding="utf-8"?>
-<c:chartSpace xmlns:c="http://schemas.openxmlformats.org/drawingml/2006/chart" xmlns:a="http://schemas.openxmlformats.org/drawingml/2006/main" xmlns:r="http://schemas.openxmlformats.org/officeDocument/2006/relationships" xmlns:c16r2="http://schemas.microsoft.com/office/drawing/2015/06/chart">
-  <c:date1904 val="1"/>
-  <c:lang val="en-US"/>
-  <c:roundedCorners val="1"/>
-  <c:style val="2"/>
+<c:chartSpace xmlns:c="http://schemas.openxmlformats.org/drawingml/2006/chart" xmlns:a="http://schemas.openxmlformats.org/drawingml/2006/main" xmlns:r="http://schemas.openxmlformats.org/officeDocument/2006/relationships">
   <c:chart>
     <c:autoTitleDeleted val="1"/>
     <c:plotArea>
-      <c:layout/>
       <c:scatterChart>
         <c:scatterStyle val="lineMarker"/>
         <c:varyColors val="0"/>
@@ -866,7 +678,7 @@
                   <c:v>0.12</c:v>
                 </c:pt>
                 <c:pt idx="6">
-                  <c:v>0.14000000000000001</c:v>
+                  <c:v>0.14</c:v>
                 </c:pt>
                 <c:pt idx="7">
                   <c:v>0.16</c:v>
@@ -887,7 +699,7 @@
                   <c:v>0.26</c:v>
                 </c:pt>
                 <c:pt idx="13">
-                  <c:v>0.28000000000000003</c:v>
+                  <c:v>0.28</c:v>
                 </c:pt>
                 <c:pt idx="14">
                   <c:v>0.3</c:v>
@@ -929,10 +741,10 @@
                   <c:v>0.54</c:v>
                 </c:pt>
                 <c:pt idx="27">
-                  <c:v>0.56000000000000005</c:v>
+                  <c:v>0.56</c:v>
                 </c:pt>
                 <c:pt idx="28">
-                  <c:v>0.57999999999999996</c:v>
+                  <c:v>0.58</c:v>
                 </c:pt>
                 <c:pt idx="29">
                   <c:v>0.6</c:v>
@@ -965,31 +777,31 @@
                   <c:v>0.11713570981863665</c:v>
                 </c:pt>
                 <c:pt idx="1">
-                  <c:v>0.15871435038478951</c:v>
+                  <c:v>0.1587143503847895</c:v>
                 </c:pt>
                 <c:pt idx="2">
-                  <c:v>0.19517754318618041</c:v>
+                  <c:v>0.1951775431861804</c:v>
                 </c:pt>
                 <c:pt idx="3">
                   <c:v>0.22888283378746593</c:v>
                 </c:pt>
                 <c:pt idx="4">
-                  <c:v>0.26103824127101422</c:v>
+                  <c:v>0.2610382412710142</c:v>
                 </c:pt>
                 <c:pt idx="5">
-                  <c:v>0.29203925845147222</c:v>
+                  <c:v>0.2920392584514722</c:v>
                 </c:pt>
                 <c:pt idx="6">
-                  <c:v>0.31828556936342889</c:v>
+                  <c:v>0.3182855693634289</c:v>
                 </c:pt>
                 <c:pt idx="7">
-                  <c:v>0.34228187919463088</c:v>
+                  <c:v>0.3422818791946309</c:v>
                 </c:pt>
                 <c:pt idx="8">
                   <c:v>0.36435643564356435</c:v>
                 </c:pt>
                 <c:pt idx="9">
-                  <c:v>0.38835311572700298</c:v>
+                  <c:v>0.388353115727003</c:v>
                 </c:pt>
                 <c:pt idx="10">
                   <c:v>0.40786240786240785</c:v>
@@ -1001,80 +813,75 @@
                   <c:v>0.4404703576678099</c:v>
                 </c:pt>
                 <c:pt idx="13">
-                  <c:v>0.45265957446808508</c:v>
+                  <c:v>0.4526595744680851</c:v>
                 </c:pt>
                 <c:pt idx="14">
-                  <c:v>0.46495327102803741</c:v>
+                  <c:v>0.4649532710280374</c:v>
                 </c:pt>
                 <c:pt idx="15">
-                  <c:v>0.48070634401569651</c:v>
+                  <c:v>0.4807063440156965</c:v>
                 </c:pt>
                 <c:pt idx="16">
-                  <c:v>0.50553505535055354</c:v>
+                  <c:v>0.5055350553505535</c:v>
                 </c:pt>
                 <c:pt idx="17">
-                  <c:v>0.51953449709060684</c:v>
+                  <c:v>0.5195344970906068</c:v>
                 </c:pt>
                 <c:pt idx="18">
-                  <c:v>0.53719008264462809</c:v>
+                  <c:v>0.5371900826446281</c:v>
                 </c:pt>
                 <c:pt idx="19">
-                  <c:v>0.55175983436853004</c:v>
+                  <c:v>0.55175983436853</c:v>
                 </c:pt>
                 <c:pt idx="20">
-                  <c:v>0.57025761124121777</c:v>
+                  <c:v>0.5702576112412178</c:v>
                 </c:pt>
                 <c:pt idx="21">
-                  <c:v>0.58629776021080371</c:v>
+                  <c:v>0.5862977602108037</c:v>
                 </c:pt>
                 <c:pt idx="22">
-                  <c:v>0.59787556904400607</c:v>
+                  <c:v>0.5978755690440061</c:v>
                 </c:pt>
                 <c:pt idx="23">
-                  <c:v>0.60726643598615915</c:v>
+                  <c:v>0.6072664359861591</c:v>
                 </c:pt>
                 <c:pt idx="24">
-                  <c:v>0.62674650698602796</c:v>
+                  <c:v>0.626746506986028</c:v>
                 </c:pt>
                 <c:pt idx="25">
                   <c:v>0.6335697399527187</c:v>
                 </c:pt>
                 <c:pt idx="26">
-                  <c:v>0.64265129682997113</c:v>
+                  <c:v>0.6426512968299711</c:v>
                 </c:pt>
                 <c:pt idx="27">
-                  <c:v>0.65591397849462363</c:v>
+                  <c:v>0.6559139784946236</c:v>
                 </c:pt>
                 <c:pt idx="28">
-                  <c:v>0.68281938325991187</c:v>
+                  <c:v>0.6828193832599119</c:v>
                 </c:pt>
                 <c:pt idx="29">
-                  <c:v>0.68965517241379315</c:v>
+                  <c:v>0.6896551724137931</c:v>
                 </c:pt>
                 <c:pt idx="30">
-                  <c:v>0.70229007633587781</c:v>
+                  <c:v>0.7022900763358778</c:v>
                 </c:pt>
                 <c:pt idx="31">
-                  <c:v>0.72448979591836737</c:v>
+                  <c:v>0.7244897959183674</c:v>
                 </c:pt>
                 <c:pt idx="32">
                   <c:v>0.7068965517241379</c:v>
                 </c:pt>
                 <c:pt idx="33">
-                  <c:v>0.70270270270270274</c:v>
+                  <c:v>0.7027027027027027</c:v>
                 </c:pt>
                 <c:pt idx="34">
-                  <c:v>0.70833333333333337</c:v>
+                  <c:v>0.7083333333333334</c:v>
                 </c:pt>
               </c:numCache>
             </c:numRef>
           </c:yVal>
           <c:smooth val="0"/>
-          <c:extLst>
-            <c:ext xmlns:c16="http://schemas.microsoft.com/office/drawing/2014/chart" uri="{C3380CC4-5D6E-409C-BE32-E72D297353CC}">
-              <c16:uniqueId val="{00000000-1728-4EC9-9070-79C3479A4A8A}"/>
-            </c:ext>
-          </c:extLst>
         </c:ser>
         <c:ser>
           <c:idx val="1"/>
@@ -1125,7 +932,7 @@
                   <c:v>0.12</c:v>
                 </c:pt>
                 <c:pt idx="6">
-                  <c:v>0.14000000000000001</c:v>
+                  <c:v>0.14</c:v>
                 </c:pt>
                 <c:pt idx="7">
                   <c:v>0.16</c:v>
@@ -1146,7 +953,7 @@
                   <c:v>0.26</c:v>
                 </c:pt>
                 <c:pt idx="13">
-                  <c:v>0.28000000000000003</c:v>
+                  <c:v>0.28</c:v>
                 </c:pt>
                 <c:pt idx="14">
                   <c:v>0.3</c:v>
@@ -1188,10 +995,10 @@
                   <c:v>0.54</c:v>
                 </c:pt>
                 <c:pt idx="27">
-                  <c:v>0.56000000000000005</c:v>
+                  <c:v>0.56</c:v>
                 </c:pt>
                 <c:pt idx="28">
-                  <c:v>0.57999999999999996</c:v>
+                  <c:v>0.58</c:v>
                 </c:pt>
                 <c:pt idx="29">
                   <c:v>0.6</c:v>
@@ -1221,55 +1028,55 @@
                 <c:formatCode>General</c:formatCode>
                 <c:ptCount val="35"/>
                 <c:pt idx="0">
-                  <c:v>0.93416458852867834</c:v>
+                  <c:v>0.9341645885286783</c:v>
                 </c:pt>
                 <c:pt idx="1">
-                  <c:v>0.87431421446384039</c:v>
+                  <c:v>0.8743142144638404</c:v>
                 </c:pt>
                 <c:pt idx="2">
-                  <c:v>0.81147132169576064</c:v>
+                  <c:v>0.8114713216957606</c:v>
                 </c:pt>
                 <c:pt idx="3">
-                  <c:v>0.75411471321695756</c:v>
+                  <c:v>0.7541147132169576</c:v>
                 </c:pt>
                 <c:pt idx="4">
-                  <c:v>0.70473815461346634</c:v>
+                  <c:v>0.7047381546134663</c:v>
                 </c:pt>
                 <c:pt idx="5">
-                  <c:v>0.66783042394014958</c:v>
+                  <c:v>0.6678304239401496</c:v>
                 </c:pt>
                 <c:pt idx="6">
-                  <c:v>0.62593516209476308</c:v>
+                  <c:v>0.6259351620947631</c:v>
                 </c:pt>
                 <c:pt idx="7">
-                  <c:v>0.58503740648379055</c:v>
+                  <c:v>0.5850374064837905</c:v>
                 </c:pt>
                 <c:pt idx="8">
-                  <c:v>0.55062344139650876</c:v>
+                  <c:v>0.5506234413965088</c:v>
                 </c:pt>
                 <c:pt idx="9">
-                  <c:v>0.52219451371571068</c:v>
+                  <c:v>0.5221945137157107</c:v>
                 </c:pt>
                 <c:pt idx="10">
-                  <c:v>0.49675810473815463</c:v>
+                  <c:v>0.4967581047381546</c:v>
                 </c:pt>
                 <c:pt idx="11">
                   <c:v>0.47331670822942645</c:v>
                 </c:pt>
                 <c:pt idx="12">
-                  <c:v>0.44837905236907732</c:v>
+                  <c:v>0.4483790523690773</c:v>
                 </c:pt>
                 <c:pt idx="13">
                   <c:v>0.42443890274314217</c:v>
                 </c:pt>
                 <c:pt idx="14">
-                  <c:v>0.39700748129675811</c:v>
+                  <c:v>0.3970074812967581</c:v>
                 </c:pt>
                 <c:pt idx="15">
                   <c:v>0.36658354114713215</c:v>
                 </c:pt>
                 <c:pt idx="16">
-                  <c:v>0.34164588528678302</c:v>
+                  <c:v>0.341645885286783</c:v>
                 </c:pt>
                 <c:pt idx="17">
                   <c:v>0.3117206982543641</c:v>
@@ -1281,7 +1088,7 @@
                   <c:v>0.26583541147132167</c:v>
                 </c:pt>
                 <c:pt idx="20">
-                  <c:v>0.24289276807980051</c:v>
+                  <c:v>0.2428927680798005</c:v>
                 </c:pt>
                 <c:pt idx="21">
                   <c:v>0.22194513715710723</c:v>
@@ -1296,44 +1103,39 @@
                   <c:v>0.15660847880299253</c:v>
                 </c:pt>
                 <c:pt idx="25">
-                  <c:v>0.13366583541147131</c:v>
+                  <c:v>0.1336658354114713</c:v>
                 </c:pt>
                 <c:pt idx="26">
                   <c:v>0.11122194513715711</c:v>
                 </c:pt>
                 <c:pt idx="27">
-                  <c:v>9.12718204488778E-2</c:v>
+                  <c:v>0.0912718204488778</c:v>
                 </c:pt>
                 <c:pt idx="28">
-                  <c:v>7.7306733167082295E-2</c:v>
+                  <c:v>0.0773067331670823</c:v>
                 </c:pt>
                 <c:pt idx="29">
-                  <c:v>5.9850374064837904E-2</c:v>
+                  <c:v>0.059850374064837904</c:v>
                 </c:pt>
                 <c:pt idx="30">
-                  <c:v>4.5885286783042392E-2</c:v>
+                  <c:v>0.04588528678304239</c:v>
                 </c:pt>
                 <c:pt idx="31">
-                  <c:v>3.541147132169576E-2</c:v>
+                  <c:v>0.03541147132169576</c:v>
                 </c:pt>
                 <c:pt idx="32">
-                  <c:v>2.0448877805486283E-2</c:v>
+                  <c:v>0.020448877805486283</c:v>
                 </c:pt>
                 <c:pt idx="33">
-                  <c:v>1.2967581047381545E-2</c:v>
+                  <c:v>0.012967581047381545</c:v>
                 </c:pt>
                 <c:pt idx="34">
-                  <c:v>8.4788029925187032E-3</c:v>
+                  <c:v>0.008478802992518703</c:v>
                 </c:pt>
               </c:numCache>
             </c:numRef>
           </c:yVal>
           <c:smooth val="0"/>
-          <c:extLst>
-            <c:ext xmlns:c16="http://schemas.microsoft.com/office/drawing/2014/chart" uri="{C3380CC4-5D6E-409C-BE32-E72D297353CC}">
-              <c16:uniqueId val="{00000001-1728-4EC9-9070-79C3479A4A8A}"/>
-            </c:ext>
-          </c:extLst>
         </c:ser>
         <c:ser>
           <c:idx val="2"/>
@@ -1385,7 +1187,7 @@
                   <c:v>0.12</c:v>
                 </c:pt>
                 <c:pt idx="6">
-                  <c:v>0.14000000000000001</c:v>
+                  <c:v>0.14</c:v>
                 </c:pt>
                 <c:pt idx="7">
                   <c:v>0.16</c:v>
@@ -1406,7 +1208,7 @@
                   <c:v>0.26</c:v>
                 </c:pt>
                 <c:pt idx="13">
-                  <c:v>0.28000000000000003</c:v>
+                  <c:v>0.28</c:v>
                 </c:pt>
                 <c:pt idx="14">
                   <c:v>0.3</c:v>
@@ -1448,10 +1250,10 @@
                   <c:v>0.54</c:v>
                 </c:pt>
                 <c:pt idx="27">
-                  <c:v>0.56000000000000005</c:v>
+                  <c:v>0.56</c:v>
                 </c:pt>
                 <c:pt idx="28">
-                  <c:v>0.57999999999999996</c:v>
+                  <c:v>0.58</c:v>
                 </c:pt>
                 <c:pt idx="29">
                   <c:v>0.6</c:v>
@@ -1484,31 +1286,31 @@
                   <c:v>0.2081689358155043</c:v>
                 </c:pt>
                 <c:pt idx="1">
-                  <c:v>0.26865900383141761</c:v>
+                  <c:v>0.2686590038314176</c:v>
                 </c:pt>
                 <c:pt idx="2">
-                  <c:v>0.31466976114495698</c:v>
+                  <c:v>0.314669761144957</c:v>
                 </c:pt>
                 <c:pt idx="3">
-                  <c:v>0.35117872488677271</c:v>
+                  <c:v>0.3511787248867727</c:v>
                 </c:pt>
                 <c:pt idx="4">
                   <c:v>0.38096521973577785</c:v>
                 </c:pt>
                 <c:pt idx="5">
-                  <c:v>0.40637329286798179</c:v>
+                  <c:v>0.4063732928679818</c:v>
                 </c:pt>
                 <c:pt idx="6">
-                  <c:v>0.42199058507061199</c:v>
+                  <c:v>0.421990585070612</c:v>
                 </c:pt>
                 <c:pt idx="7">
-                  <c:v>0.43188512518409428</c:v>
+                  <c:v>0.4318851251840943</c:v>
                 </c:pt>
                 <c:pt idx="8">
                   <c:v>0.4385302879841112</c:v>
                 </c:pt>
                 <c:pt idx="9">
-                  <c:v>0.44543714103382259</c:v>
+                  <c:v>0.4454371410338226</c:v>
                 </c:pt>
                 <c:pt idx="10">
                   <c:v>0.44794243310096693</c:v>
@@ -1517,16 +1319,16 @@
                   <c:v>0.4467984934086629</c:v>
                 </c:pt>
                 <c:pt idx="12">
-                  <c:v>0.44438952051408798</c:v>
+                  <c:v>0.444389520514088</c:v>
                 </c:pt>
                 <c:pt idx="13">
-                  <c:v>0.43809523809523809</c:v>
+                  <c:v>0.4380952380952381</c:v>
                 </c:pt>
                 <c:pt idx="14">
-                  <c:v>0.42830239440408929</c:v>
+                  <c:v>0.4283023944040893</c:v>
                 </c:pt>
                 <c:pt idx="15">
-                  <c:v>0.41595925297113751</c:v>
+                  <c:v>0.4159592529711375</c:v>
                 </c:pt>
                 <c:pt idx="16">
                   <c:v>0.40773809523809523</c:v>
@@ -1547,7 +1349,7 @@
                   <c:v>0.3219971056439942</c:v>
                 </c:pt>
                 <c:pt idx="22">
-                  <c:v>0.29579579579579579</c:v>
+                  <c:v>0.2957957957957958</c:v>
                 </c:pt>
                 <c:pt idx="23">
                   <c:v>0.27177700348432055</c:v>
@@ -1568,32 +1370,27 @@
                   <c:v>0.1388888888888889</c:v>
                 </c:pt>
                 <c:pt idx="29">
-                  <c:v>0.11014226709499771</c:v>
+                  <c:v>0.1101422670949977</c:v>
                 </c:pt>
                 <c:pt idx="30">
-                  <c:v>8.6142322097378279E-2</c:v>
+                  <c:v>0.08614232209737828</c:v>
                 </c:pt>
                 <c:pt idx="31">
-                  <c:v>6.7522586780789345E-2</c:v>
+                  <c:v>0.06752258678078935</c:v>
                 </c:pt>
                 <c:pt idx="32">
-                  <c:v>3.9747939893359188E-2</c:v>
+                  <c:v>0.03974793989335919</c:v>
                 </c:pt>
                 <c:pt idx="33">
-                  <c:v>2.5465230166503428E-2</c:v>
+                  <c:v>0.025465230166503428</c:v>
                 </c:pt>
                 <c:pt idx="34">
-                  <c:v>1.6757023164120255E-2</c:v>
+                  <c:v>0.016757023164120255</c:v>
                 </c:pt>
               </c:numCache>
             </c:numRef>
           </c:yVal>
           <c:smooth val="0"/>
-          <c:extLst>
-            <c:ext xmlns:c16="http://schemas.microsoft.com/office/drawing/2014/chart" uri="{C3380CC4-5D6E-409C-BE32-E72D297353CC}">
-              <c16:uniqueId val="{00000002-1728-4EC9-9070-79C3479A4A8A}"/>
-            </c:ext>
-          </c:extLst>
         </c:ser>
         <c:ser>
           <c:idx val="3"/>
@@ -1651,20 +1448,7 @@
             </c:numRef>
           </c:yVal>
           <c:smooth val="0"/>
-          <c:extLst>
-            <c:ext xmlns:c16="http://schemas.microsoft.com/office/drawing/2014/chart" uri="{C3380CC4-5D6E-409C-BE32-E72D297353CC}">
-              <c16:uniqueId val="{00000003-1728-4EC9-9070-79C3479A4A8A}"/>
-            </c:ext>
-          </c:extLst>
         </c:ser>
-        <c:dLbls>
-          <c:showLegendKey val="0"/>
-          <c:showVal val="0"/>
-          <c:showCatName val="0"/>
-          <c:showSerName val="0"/>
-          <c:showPercent val="0"/>
-          <c:showBubbleSize val="0"/>
-        </c:dLbls>
         <c:axId val="-2128940872"/>
         <c:axId val="-2129643912"/>
       </c:scatterChart>
@@ -1673,7 +1457,7 @@
         <c:scaling>
           <c:orientation val="minMax"/>
           <c:max val="0.7"/>
-          <c:min val="0"/>
+          <c:min val="0.0"/>
         </c:scaling>
         <c:delete val="0"/>
         <c:axPos val="b"/>
@@ -1697,8 +1481,8 @@
         <c:axId val="-2129643912"/>
         <c:scaling>
           <c:orientation val="minMax"/>
-          <c:max val="1"/>
-          <c:min val="0"/>
+          <c:max val="1.0"/>
+          <c:min val="0.0"/>
         </c:scaling>
         <c:delete val="0"/>
         <c:axPos val="l"/>
@@ -1730,6 +1514,7 @@
     </c:plotArea>
     <c:legend>
       <c:legendPos val="b"/>
+      <c:layout/>
       <c:overlay val="0"/>
       <c:txPr>
         <a:bodyPr/>
@@ -1738,7 +1523,6 @@
           <a:pPr>
             <a:defRPr sz="1100"/>
           </a:pPr>
-          <a:endParaRPr lang="en-US"/>
         </a:p>
       </c:txPr>
     </c:legend>
@@ -1849,7 +1633,7 @@
           <a:p>
             <a:fld id="{F25E09D7-0ED3-4FB4-968D-50574EBBA179}" type="datetimeFigureOut">
               <a:rPr lang="en-IN" smtClean="0"/>
-              <a:t>14-10-2026</a:t>
+              <a:t>22-09-2026</a:t>
             </a:fld>
             <a:endParaRPr lang="en-IN"/>
           </a:p>
@@ -2118,7 +1902,7 @@
 </file>
 
 <file path=ppt/notesSlides/notesSlide1.xml><?xml version="1.0" encoding="utf-8"?>
-<p:notes xmlns:a="http://schemas.openxmlformats.org/drawingml/2006/main" xmlns:r="http://schemas.openxmlformats.org/officeDocument/2006/relationships" xmlns:p="http://schemas.openxmlformats.org/presentationml/2006/main">
+<p:notes xmlns:a="http://schemas.openxmlformats.org/drawingml/2006/main" xmlns:p="http://schemas.openxmlformats.org/presentationml/2006/main" xmlns:r="http://schemas.openxmlformats.org/officeDocument/2006/relationships">
   <p:cSld>
     <p:spTree>
       <p:nvGrpSpPr>
@@ -2138,7 +1922,7 @@
         <p:nvSpPr>
           <p:cNvPr id="2" name="Slide Image Placeholder 1"/>
           <p:cNvSpPr>
-            <a:spLocks noGrp="1" noRot="1" noChangeAspect="1"/>
+            <a:spLocks noGrp="1"/>
           </p:cNvSpPr>
           <p:nvPr>
             <p:ph type="sldImg" idx="2"/>
@@ -2153,7 +1937,7 @@
             <a:spLocks noGrp="1"/>
           </p:cNvSpPr>
           <p:nvPr>
-            <p:ph type="body" sz="quarter" idx="3"/>
+            <p:ph type="body" idx="3" sz="quarter"/>
           </p:nvPr>
         </p:nvSpPr>
         <p:spPr/>
@@ -2174,7 +1958,7 @@
             <a:spLocks noGrp="1"/>
           </p:cNvSpPr>
           <p:nvPr>
-            <p:ph type="sldNum" sz="quarter" idx="5"/>
+            <p:ph type="sldNum" idx="5" sz="quarter"/>
           </p:nvPr>
         </p:nvSpPr>
         <p:spPr/>
@@ -2188,7 +1972,7 @@
 </file>
 
 <file path=ppt/notesSlides/notesSlide2.xml><?xml version="1.0" encoding="utf-8"?>
-<p:notes xmlns:a="http://schemas.openxmlformats.org/drawingml/2006/main" xmlns:r="http://schemas.openxmlformats.org/officeDocument/2006/relationships" xmlns:p="http://schemas.openxmlformats.org/presentationml/2006/main">
+<p:notes xmlns:a="http://schemas.openxmlformats.org/drawingml/2006/main" xmlns:p="http://schemas.openxmlformats.org/presentationml/2006/main" xmlns:r="http://schemas.openxmlformats.org/officeDocument/2006/relationships">
   <p:cSld>
     <p:spTree>
       <p:nvGrpSpPr>
@@ -2208,7 +1992,7 @@
         <p:nvSpPr>
           <p:cNvPr id="2" name="Slide Image Placeholder 1"/>
           <p:cNvSpPr>
-            <a:spLocks noGrp="1" noRot="1" noChangeAspect="1"/>
+            <a:spLocks noGrp="1"/>
           </p:cNvSpPr>
           <p:nvPr>
             <p:ph type="sldImg" idx="2"/>
@@ -2223,7 +2007,7 @@
             <a:spLocks noGrp="1"/>
           </p:cNvSpPr>
           <p:nvPr>
-            <p:ph type="body" sz="quarter" idx="3"/>
+            <p:ph type="body" idx="3" sz="quarter"/>
           </p:nvPr>
         </p:nvSpPr>
         <p:spPr/>
@@ -2244,7 +2028,7 @@
             <a:spLocks noGrp="1"/>
           </p:cNvSpPr>
           <p:nvPr>
-            <p:ph type="sldNum" sz="quarter" idx="5"/>
+            <p:ph type="sldNum" idx="5" sz="quarter"/>
           </p:nvPr>
         </p:nvSpPr>
         <p:spPr/>
@@ -2258,7 +2042,7 @@
 </file>
 
 <file path=ppt/notesSlides/notesSlide3.xml><?xml version="1.0" encoding="utf-8"?>
-<p:notes xmlns:a="http://schemas.openxmlformats.org/drawingml/2006/main" xmlns:r="http://schemas.openxmlformats.org/officeDocument/2006/relationships" xmlns:p="http://schemas.openxmlformats.org/presentationml/2006/main">
+<p:notes xmlns:a="http://schemas.openxmlformats.org/drawingml/2006/main" xmlns:p="http://schemas.openxmlformats.org/presentationml/2006/main" xmlns:r="http://schemas.openxmlformats.org/officeDocument/2006/relationships">
   <p:cSld>
     <p:spTree>
       <p:nvGrpSpPr>
@@ -2278,7 +2062,7 @@
         <p:nvSpPr>
           <p:cNvPr id="2" name="Slide Image Placeholder 1"/>
           <p:cNvSpPr>
-            <a:spLocks noGrp="1" noRot="1" noChangeAspect="1"/>
+            <a:spLocks noGrp="1"/>
           </p:cNvSpPr>
           <p:nvPr>
             <p:ph type="sldImg" idx="2"/>
@@ -2293,7 +2077,7 @@
             <a:spLocks noGrp="1"/>
           </p:cNvSpPr>
           <p:nvPr>
-            <p:ph type="body" sz="quarter" idx="3"/>
+            <p:ph type="body" idx="3" sz="quarter"/>
           </p:nvPr>
         </p:nvSpPr>
         <p:spPr/>
@@ -2302,7 +2086,7 @@
           <a:lstStyle/>
           <a:p>
             <a:r>
-              <a:t>Methodology. The split is stratified 60/20/20 and every fitted statistic comes from training data only. Five Random Forest configurations were compared on validation by PR-AUC, the decision threshold was chosen on validation by maximising F1, and the winner was refitted on train plus validation and scored once on test. The forest builds 300 decision trees, each on a bootstrap sample with random feature subsets at every split. The probability is the mean of the per-tree leaf proportions, not a hard majority vote.</a:t>
+              <a:t>Methodology. The split is stratified 60/20/20 and every fitted statistic comes from training data only. Five Random Forest configurations were compared on validation by PR-AUC, the decision threshold was chosen on validation by maximising F1, and the winner was refitted on train plus validation and scored once on test. The forest builds 300 decision trees. Each gets its own copy of the training rows, drawn at random with replacement so a row may appear twice or not at all — the statistics term is a bootstrap sample — and each split searches only a random subset of the features. The probability is the mean of the per-tree leaf proportions, not a hard majority vote.</a:t>
             </a:r>
           </a:p>
         </p:txBody>
@@ -2314,7 +2098,7 @@
             <a:spLocks noGrp="1"/>
           </p:cNvSpPr>
           <p:nvPr>
-            <p:ph type="sldNum" sz="quarter" idx="5"/>
+            <p:ph type="sldNum" idx="5" sz="quarter"/>
           </p:nvPr>
         </p:nvSpPr>
         <p:spPr/>
@@ -2328,7 +2112,7 @@
 </file>
 
 <file path=ppt/notesSlides/notesSlide4.xml><?xml version="1.0" encoding="utf-8"?>
-<p:notes xmlns:a="http://schemas.openxmlformats.org/drawingml/2006/main" xmlns:r="http://schemas.openxmlformats.org/officeDocument/2006/relationships" xmlns:p="http://schemas.openxmlformats.org/presentationml/2006/main">
+<p:notes xmlns:a="http://schemas.openxmlformats.org/drawingml/2006/main" xmlns:p="http://schemas.openxmlformats.org/presentationml/2006/main" xmlns:r="http://schemas.openxmlformats.org/officeDocument/2006/relationships">
   <p:cSld>
     <p:spTree>
       <p:nvGrpSpPr>
@@ -2348,7 +2132,7 @@
         <p:nvSpPr>
           <p:cNvPr id="2" name="Slide Image Placeholder 1"/>
           <p:cNvSpPr>
-            <a:spLocks noGrp="1" noRot="1" noChangeAspect="1"/>
+            <a:spLocks noGrp="1"/>
           </p:cNvSpPr>
           <p:nvPr>
             <p:ph type="sldImg" idx="2"/>
@@ -2363,7 +2147,7 @@
             <a:spLocks noGrp="1"/>
           </p:cNvSpPr>
           <p:nvPr>
-            <p:ph type="body" sz="quarter" idx="3"/>
+            <p:ph type="body" idx="3" sz="quarter"/>
           </p:nvPr>
         </p:nvSpPr>
         <p:spPr/>
@@ -2384,7 +2168,7 @@
             <a:spLocks noGrp="1"/>
           </p:cNvSpPr>
           <p:nvPr>
-            <p:ph type="sldNum" sz="quarter" idx="5"/>
+            <p:ph type="sldNum" idx="5" sz="quarter"/>
           </p:nvPr>
         </p:nvSpPr>
         <p:spPr/>
@@ -2578,7 +2362,7 @@
           <a:p>
             <a:fld id="{5A7CAFCF-AC79-4329-BEB1-D88D25EDB3E2}" type="datetimeFigureOut">
               <a:rPr lang="en-IN" smtClean="0"/>
-              <a:t>14-10-2026</a:t>
+              <a:t>22-09-2026</a:t>
             </a:fld>
             <a:endParaRPr lang="en-IN"/>
           </a:p>
@@ -2748,7 +2532,7 @@
           <a:p>
             <a:fld id="{5A7CAFCF-AC79-4329-BEB1-D88D25EDB3E2}" type="datetimeFigureOut">
               <a:rPr lang="en-IN" smtClean="0"/>
-              <a:t>14-10-2026</a:t>
+              <a:t>22-09-2026</a:t>
             </a:fld>
             <a:endParaRPr lang="en-IN"/>
           </a:p>
@@ -2928,7 +2712,7 @@
           <a:p>
             <a:fld id="{5A7CAFCF-AC79-4329-BEB1-D88D25EDB3E2}" type="datetimeFigureOut">
               <a:rPr lang="en-IN" smtClean="0"/>
-              <a:t>14-10-2026</a:t>
+              <a:t>22-09-2026</a:t>
             </a:fld>
             <a:endParaRPr lang="en-IN"/>
           </a:p>
@@ -3098,7 +2882,7 @@
           <a:p>
             <a:fld id="{5A7CAFCF-AC79-4329-BEB1-D88D25EDB3E2}" type="datetimeFigureOut">
               <a:rPr lang="en-IN" smtClean="0"/>
-              <a:t>14-10-2026</a:t>
+              <a:t>22-09-2026</a:t>
             </a:fld>
             <a:endParaRPr lang="en-IN"/>
           </a:p>
@@ -3344,7 +3128,7 @@
           <a:p>
             <a:fld id="{5A7CAFCF-AC79-4329-BEB1-D88D25EDB3E2}" type="datetimeFigureOut">
               <a:rPr lang="en-IN" smtClean="0"/>
-              <a:t>14-10-2026</a:t>
+              <a:t>22-09-2026</a:t>
             </a:fld>
             <a:endParaRPr lang="en-IN"/>
           </a:p>
@@ -3632,7 +3416,7 @@
           <a:p>
             <a:fld id="{5A7CAFCF-AC79-4329-BEB1-D88D25EDB3E2}" type="datetimeFigureOut">
               <a:rPr lang="en-IN" smtClean="0"/>
-              <a:t>14-10-2026</a:t>
+              <a:t>22-09-2026</a:t>
             </a:fld>
             <a:endParaRPr lang="en-IN"/>
           </a:p>
@@ -4054,7 +3838,7 @@
           <a:p>
             <a:fld id="{5A7CAFCF-AC79-4329-BEB1-D88D25EDB3E2}" type="datetimeFigureOut">
               <a:rPr lang="en-IN" smtClean="0"/>
-              <a:t>14-10-2026</a:t>
+              <a:t>22-09-2026</a:t>
             </a:fld>
             <a:endParaRPr lang="en-IN"/>
           </a:p>
@@ -4172,7 +3956,7 @@
           <a:p>
             <a:fld id="{5A7CAFCF-AC79-4329-BEB1-D88D25EDB3E2}" type="datetimeFigureOut">
               <a:rPr lang="en-IN" smtClean="0"/>
-              <a:t>14-10-2026</a:t>
+              <a:t>22-09-2026</a:t>
             </a:fld>
             <a:endParaRPr lang="en-IN"/>
           </a:p>
@@ -4267,7 +4051,7 @@
           <a:p>
             <a:fld id="{5A7CAFCF-AC79-4329-BEB1-D88D25EDB3E2}" type="datetimeFigureOut">
               <a:rPr lang="en-IN" smtClean="0"/>
-              <a:t>14-10-2026</a:t>
+              <a:t>22-09-2026</a:t>
             </a:fld>
             <a:endParaRPr lang="en-IN"/>
           </a:p>
@@ -4544,7 +4328,7 @@
           <a:p>
             <a:fld id="{5A7CAFCF-AC79-4329-BEB1-D88D25EDB3E2}" type="datetimeFigureOut">
               <a:rPr lang="en-IN" smtClean="0"/>
-              <a:t>14-10-2026</a:t>
+              <a:t>22-09-2026</a:t>
             </a:fld>
             <a:endParaRPr lang="en-IN"/>
           </a:p>
@@ -4797,7 +4581,7 @@
           <a:p>
             <a:fld id="{5A7CAFCF-AC79-4329-BEB1-D88D25EDB3E2}" type="datetimeFigureOut">
               <a:rPr lang="en-IN" smtClean="0"/>
-              <a:t>14-10-2026</a:t>
+              <a:t>22-09-2026</a:t>
             </a:fld>
             <a:endParaRPr lang="en-IN"/>
           </a:p>
@@ -5010,7 +4794,7 @@
           <a:p>
             <a:fld id="{5A7CAFCF-AC79-4329-BEB1-D88D25EDB3E2}" type="datetimeFigureOut">
               <a:rPr lang="en-IN" smtClean="0"/>
-              <a:t>14-10-2026</a:t>
+              <a:t>22-09-2026</a:t>
             </a:fld>
             <a:endParaRPr lang="en-IN"/>
           </a:p>
@@ -5400,7 +5184,7 @@
           <p:nvPr/>
         </p:nvPicPr>
         <p:blipFill>
-          <a:blip r:embed="rId3">
+          <a:blip r:embed="rId2">
             <a:extLst>
               <a:ext uri="{28A0092B-C50C-407E-A947-70E740481C1C}">
                 <a14:useLocalDpi xmlns:a14="http://schemas.microsoft.com/office/drawing/2010/main" val="0"/>
@@ -5452,7 +5236,7 @@
           <p:nvPr/>
         </p:nvPicPr>
         <p:blipFill>
-          <a:blip r:embed="rId4">
+          <a:blip r:embed="rId3">
             <a:extLst>
               <a:ext uri="{28A0092B-C50C-407E-A947-70E740481C1C}">
                 <a14:useLocalDpi xmlns:a14="http://schemas.microsoft.com/office/drawing/2010/main" val="0"/>
@@ -5678,7 +5462,7 @@
         </p:nvSpPr>
         <p:spPr>
           <a:xfrm>
-            <a:off x="0" y="1973574"/>
+            <a:off x="0" y="1783080"/>
             <a:ext cx="12192000" cy="1292662"/>
           </a:xfrm>
           <a:prstGeom prst="rect">
@@ -5736,7 +5520,7 @@
         </p:nvSpPr>
         <p:spPr>
           <a:xfrm>
-            <a:off x="1199456" y="3429000"/>
+            <a:off x="1188720" y="3200400"/>
             <a:ext cx="9793088" cy="2103120"/>
           </a:xfrm>
           <a:prstGeom prst="rect">
@@ -5760,7 +5544,7 @@
               <a:defRPr/>
             </a:pPr>
             <a:r>
-              <a:rPr sz="2000" b="1" i="0" dirty="0">
+              <a:rPr sz="2000" b="1" i="0">
                 <a:solidFill>
                   <a:srgbClr val="1A1A1A"/>
                 </a:solidFill>
@@ -5776,29 +5560,14 @@
               </a:spcAft>
             </a:pPr>
             <a:r>
-              <a:rPr sz="2000" b="1" i="0" dirty="0">
+              <a:rPr sz="2000" b="1" i="0">
                 <a:solidFill>
                   <a:srgbClr val="1A1A1A"/>
                 </a:solidFill>
                 <a:latin typeface="Book Antiqua"/>
               </a:rPr>
-              <a:t>Faculty: Prof. Neeraj </a:t>
-            </a:r>
-            <a:r>
-              <a:rPr sz="2000" b="1" i="0" dirty="0" err="1">
-                <a:solidFill>
-                  <a:srgbClr val="1A1A1A"/>
-                </a:solidFill>
-                <a:latin typeface="Book Antiqua"/>
-              </a:rPr>
-              <a:t>Sathawane</a:t>
-            </a:r>
-            <a:endParaRPr sz="2000" b="1" i="0" dirty="0">
-              <a:solidFill>
-                <a:srgbClr val="1A1A1A"/>
-              </a:solidFill>
-              <a:latin typeface="Book Antiqua"/>
-            </a:endParaRPr>
+              <a:t>Faculty: Prof. Neeraj Sathwale</a:t>
+            </a:r>
           </a:p>
           <a:p>
             <a:pPr>
@@ -5807,7 +5576,7 @@
               </a:spcAft>
             </a:pPr>
             <a:r>
-              <a:rPr sz="2000" b="1" i="0" dirty="0">
+              <a:rPr sz="2000" b="1" i="0">
                 <a:solidFill>
                   <a:srgbClr val="1A1A1A"/>
                 </a:solidFill>
@@ -5832,7 +5601,7 @@
 </file>
 
 <file path=ppt/slides/slide2.xml><?xml version="1.0" encoding="utf-8"?>
-<p:sld xmlns:a="http://schemas.openxmlformats.org/drawingml/2006/main" xmlns:r="http://schemas.openxmlformats.org/officeDocument/2006/relationships" xmlns:p="http://schemas.openxmlformats.org/presentationml/2006/main">
+<p:sld xmlns:a="http://schemas.openxmlformats.org/drawingml/2006/main" xmlns:p="http://schemas.openxmlformats.org/presentationml/2006/main" xmlns:r="http://schemas.openxmlformats.org/officeDocument/2006/relationships">
   <p:cSld>
     <p:spTree>
       <p:nvGrpSpPr>
@@ -5840,14 +5609,7 @@
         <p:cNvGrpSpPr/>
         <p:nvPr/>
       </p:nvGrpSpPr>
-      <p:grpSpPr>
-        <a:xfrm>
-          <a:off x="0" y="0"/>
-          <a:ext cx="0" cy="0"/>
-          <a:chOff x="0" y="0"/>
-          <a:chExt cx="0" cy="0"/>
-        </a:xfrm>
-      </p:grpSpPr>
+      <p:grpSpPr/>
       <p:sp>
         <p:nvSpPr>
           <p:cNvPr id="2" name="Title 1"/>
@@ -5865,7 +5627,7 @@
           </a:xfrm>
         </p:spPr>
         <p:txBody>
-          <a:bodyPr wrap="square" lIns="0" tIns="0" rIns="0" bIns="0" anchor="ctr"/>
+          <a:bodyPr wrap="square" anchor="ctr" lIns="0" tIns="0" rIns="0" bIns="0"/>
           <a:lstStyle/>
           <a:p>
             <a:pPr algn="ctr"/>
@@ -5898,7 +5660,7 @@
           <a:noFill/>
         </p:spPr>
         <p:txBody>
-          <a:bodyPr wrap="square" lIns="0" tIns="0" rIns="0" bIns="0" anchor="t">
+          <a:bodyPr wrap="square" anchor="t" lIns="0" tIns="0" rIns="0" bIns="0">
             <a:spAutoFit/>
           </a:bodyPr>
           <a:lstStyle/>
@@ -5955,7 +5717,7 @@
           </a:fontRef>
         </p:style>
         <p:txBody>
-          <a:bodyPr wrap="square" lIns="73152" tIns="36576" rIns="73152" bIns="36576" rtlCol="0" anchor="ctr"/>
+          <a:bodyPr rtlCol="0" anchor="ctr" wrap="square" lIns="73152" tIns="36576" rIns="73152" bIns="36576"/>
           <a:lstStyle/>
           <a:p>
             <a:pPr algn="ctr"/>
@@ -6022,7 +5784,7 @@
           </a:fontRef>
         </p:style>
         <p:txBody>
-          <a:bodyPr wrap="square" lIns="73152" tIns="36576" rIns="73152" bIns="36576" rtlCol="0" anchor="ctr"/>
+          <a:bodyPr rtlCol="0" anchor="ctr" wrap="square" lIns="73152" tIns="36576" rIns="73152" bIns="36576"/>
           <a:lstStyle/>
           <a:p>
             <a:pPr algn="ctr"/>
@@ -6089,7 +5851,7 @@
           </a:fontRef>
         </p:style>
         <p:txBody>
-          <a:bodyPr wrap="square" lIns="73152" tIns="36576" rIns="73152" bIns="36576" rtlCol="0" anchor="ctr"/>
+          <a:bodyPr rtlCol="0" anchor="ctr" wrap="square" lIns="73152" tIns="36576" rIns="73152" bIns="36576"/>
           <a:lstStyle/>
           <a:p>
             <a:pPr algn="ctr"/>
@@ -6134,7 +5896,7 @@
           <a:noFill/>
         </p:spPr>
         <p:txBody>
-          <a:bodyPr wrap="square" lIns="0" tIns="0" rIns="0" bIns="0" anchor="t">
+          <a:bodyPr wrap="square" anchor="t" lIns="0" tIns="0" rIns="0" bIns="0">
             <a:spAutoFit/>
           </a:bodyPr>
           <a:lstStyle/>
@@ -6193,7 +5955,6 @@
           <a:lstStyle/>
           <a:p>
             <a:pPr algn="ctr"/>
-            <a:endParaRPr/>
           </a:p>
         </p:txBody>
       </p:sp>
@@ -6236,7 +5997,7 @@
           </a:fontRef>
         </p:style>
         <p:txBody>
-          <a:bodyPr wrap="square" lIns="73152" tIns="36576" rIns="73152" bIns="36576" rtlCol="0" anchor="ctr"/>
+          <a:bodyPr rtlCol="0" anchor="ctr" wrap="square" lIns="73152" tIns="36576" rIns="73152" bIns="36576"/>
           <a:lstStyle/>
           <a:p>
             <a:pPr algn="ctr"/>
@@ -6269,7 +6030,7 @@
           <a:noFill/>
         </p:spPr>
         <p:txBody>
-          <a:bodyPr wrap="square" lIns="0" tIns="0" rIns="0" bIns="0" anchor="t">
+          <a:bodyPr wrap="square" anchor="t" lIns="0" tIns="0" rIns="0" bIns="0">
             <a:spAutoFit/>
           </a:bodyPr>
           <a:lstStyle/>
@@ -6286,7 +6047,7 @@
                 </a:solidFill>
                 <a:latin typeface="Times New Roman"/>
               </a:rPr>
-              <a:t>30â€“59 days late</a:t>
+              <a:t>30–59 days late</a:t>
             </a:r>
           </a:p>
           <a:p>
@@ -6302,7 +6063,7 @@
                 </a:solidFill>
                 <a:latin typeface="Times New Roman"/>
               </a:rPr>
-              <a:t>60â€“89 days late</a:t>
+              <a:t>60–89 days late</a:t>
             </a:r>
           </a:p>
           <a:p>
@@ -6364,7 +6125,6 @@
           <a:lstStyle/>
           <a:p>
             <a:pPr algn="ctr"/>
-            <a:endParaRPr/>
           </a:p>
         </p:txBody>
       </p:sp>
@@ -6407,7 +6167,7 @@
           </a:fontRef>
         </p:style>
         <p:txBody>
-          <a:bodyPr wrap="square" lIns="73152" tIns="36576" rIns="73152" bIns="36576" rtlCol="0" anchor="ctr"/>
+          <a:bodyPr rtlCol="0" anchor="ctr" wrap="square" lIns="73152" tIns="36576" rIns="73152" bIns="36576"/>
           <a:lstStyle/>
           <a:p>
             <a:pPr algn="ctr"/>
@@ -6440,7 +6200,7 @@
           <a:noFill/>
         </p:spPr>
         <p:txBody>
-          <a:bodyPr wrap="square" lIns="0" tIns="0" rIns="0" bIns="0" anchor="t">
+          <a:bodyPr wrap="square" anchor="t" lIns="0" tIns="0" rIns="0" bIns="0">
             <a:spAutoFit/>
           </a:bodyPr>
           <a:lstStyle/>
@@ -6551,7 +6311,6 @@
           <a:lstStyle/>
           <a:p>
             <a:pPr algn="ctr"/>
-            <a:endParaRPr/>
           </a:p>
         </p:txBody>
       </p:sp>
@@ -6594,7 +6353,7 @@
           </a:fontRef>
         </p:style>
         <p:txBody>
-          <a:bodyPr wrap="square" lIns="73152" tIns="36576" rIns="73152" bIns="36576" rtlCol="0" anchor="ctr"/>
+          <a:bodyPr rtlCol="0" anchor="ctr" wrap="square" lIns="73152" tIns="36576" rIns="73152" bIns="36576"/>
           <a:lstStyle/>
           <a:p>
             <a:pPr algn="ctr"/>
@@ -6627,7 +6386,7 @@
           <a:noFill/>
         </p:spPr>
         <p:txBody>
-          <a:bodyPr wrap="square" lIns="0" tIns="0" rIns="0" bIns="0" anchor="t">
+          <a:bodyPr wrap="square" anchor="t" lIns="0" tIns="0" rIns="0" bIns="0">
             <a:spAutoFit/>
           </a:bodyPr>
           <a:lstStyle/>
@@ -6756,7 +6515,7 @@
           </a:fontRef>
         </p:style>
         <p:txBody>
-          <a:bodyPr wrap="square" lIns="73152" tIns="36576" rIns="73152" bIns="36576" rtlCol="0" anchor="ctr"/>
+          <a:bodyPr rtlCol="0" anchor="ctr" wrap="square" lIns="73152" tIns="36576" rIns="73152" bIns="36576"/>
           <a:lstStyle/>
           <a:p>
             <a:pPr algn="ctr">
@@ -6805,7 +6564,7 @@
           <a:noFill/>
         </p:spPr>
         <p:txBody>
-          <a:bodyPr wrap="square" lIns="0" tIns="0" rIns="0" bIns="0" anchor="t">
+          <a:bodyPr wrap="square" anchor="t" lIns="0" tIns="0" rIns="0" bIns="0">
             <a:spAutoFit/>
           </a:bodyPr>
           <a:lstStyle/>
@@ -6837,7 +6596,7 @@
         </p:xfrm>
         <a:graphic>
           <a:graphicData uri="http://schemas.openxmlformats.org/drawingml/2006/chart">
-            <c:chart xmlns:c="http://schemas.openxmlformats.org/drawingml/2006/chart" xmlns:r="http://schemas.openxmlformats.org/officeDocument/2006/relationships" r:id="rId3"/>
+            <c:chart xmlns:c="http://schemas.openxmlformats.org/drawingml/2006/chart" r:id="rId2"/>
           </a:graphicData>
         </a:graphic>
       </p:graphicFrame>
@@ -6858,7 +6617,7 @@
           <a:noFill/>
         </p:spPr>
         <p:txBody>
-          <a:bodyPr wrap="square" lIns="0" tIns="0" rIns="0" bIns="0" anchor="t">
+          <a:bodyPr wrap="square" anchor="t" lIns="0" tIns="0" rIns="0" bIns="0">
             <a:spAutoFit/>
           </a:bodyPr>
           <a:lstStyle/>
@@ -6871,7 +6630,7 @@
                 </a:solidFill>
                 <a:latin typeface="Times New Roman"/>
               </a:rPr>
-              <a:t>Always answering â€œnoâ€ scores 93.3% accuracy and catches no one.</a:t>
+              <a:t>Always answering “no” scores 93.3% accuracy and catches no one.</a:t>
             </a:r>
           </a:p>
         </p:txBody>
@@ -6893,7 +6652,7 @@
           <a:noFill/>
         </p:spPr>
         <p:txBody>
-          <a:bodyPr wrap="square" lIns="0" tIns="0" rIns="0" bIns="0" anchor="t">
+          <a:bodyPr wrap="square" anchor="t" lIns="0" tIns="0" rIns="0" bIns="0">
             <a:spAutoFit/>
           </a:bodyPr>
           <a:lstStyle/>
@@ -6926,36 +6685,18 @@
         <a:graphic>
           <a:graphicData uri="http://schemas.openxmlformats.org/drawingml/2006/table">
             <a:tbl>
-              <a:tblPr>
+              <a:tblPr firstRow="0" bandRow="0">
                 <a:tableStyleId>{2D5ABB26-0587-4C30-8999-92F81FD0307C}</a:tableStyleId>
               </a:tblPr>
               <a:tblGrid>
-                <a:gridCol w="2514600">
-                  <a:extLst>
-                    <a:ext uri="{9D8B030D-6E8A-4147-A177-3AD203B41FA5}">
-                      <a16:colId xmlns:a16="http://schemas.microsoft.com/office/drawing/2014/main" val="20000"/>
-                    </a:ext>
-                  </a:extLst>
-                </a:gridCol>
-                <a:gridCol w="960120">
-                  <a:extLst>
-                    <a:ext uri="{9D8B030D-6E8A-4147-A177-3AD203B41FA5}">
-                      <a16:colId xmlns:a16="http://schemas.microsoft.com/office/drawing/2014/main" val="20001"/>
-                    </a:ext>
-                  </a:extLst>
-                </a:gridCol>
-                <a:gridCol w="2011680">
-                  <a:extLst>
-                    <a:ext uri="{9D8B030D-6E8A-4147-A177-3AD203B41FA5}">
-                      <a16:colId xmlns:a16="http://schemas.microsoft.com/office/drawing/2014/main" val="20002"/>
-                    </a:ext>
-                  </a:extLst>
-                </a:gridCol>
+                <a:gridCol w="2514600"/>
+                <a:gridCol w="960120"/>
+                <a:gridCol w="2011680"/>
               </a:tblGrid>
               <a:tr h="338328">
                 <a:tc>
                   <a:txBody>
-                    <a:bodyPr/>
+                    <a:bodyPr wrap="square" anchor="ctr" lIns="73152" tIns="27432" rIns="73152" bIns="27432"/>
                     <a:lstStyle/>
                     <a:p>
                       <a:pPr algn="l"/>
@@ -6970,7 +6711,7 @@
                       </a:r>
                     </a:p>
                   </a:txBody>
-                  <a:tcPr marL="73152" marR="73152" marT="27432" marB="27432" anchor="ctr">
+                  <a:tcPr anchor="ctr" marL="73152" marR="73152" marT="27432" marB="27432">
                     <a:lnL w="0">
                       <a:noFill/>
                     </a:lnL>
@@ -6992,7 +6733,7 @@
                 </a:tc>
                 <a:tc>
                   <a:txBody>
-                    <a:bodyPr/>
+                    <a:bodyPr wrap="square" anchor="ctr" lIns="73152" tIns="27432" rIns="73152" bIns="27432"/>
                     <a:lstStyle/>
                     <a:p>
                       <a:pPr algn="ctr"/>
@@ -7007,7 +6748,7 @@
                       </a:r>
                     </a:p>
                   </a:txBody>
-                  <a:tcPr marL="73152" marR="73152" marT="27432" marB="27432" anchor="ctr">
+                  <a:tcPr anchor="ctr" marL="73152" marR="73152" marT="27432" marB="27432">
                     <a:lnL w="0">
                       <a:noFill/>
                     </a:lnL>
@@ -7029,7 +6770,7 @@
                 </a:tc>
                 <a:tc>
                   <a:txBody>
-                    <a:bodyPr/>
+                    <a:bodyPr wrap="square" anchor="ctr" lIns="73152" tIns="27432" rIns="73152" bIns="27432"/>
                     <a:lstStyle/>
                     <a:p>
                       <a:pPr algn="ctr"/>
@@ -7044,7 +6785,7 @@
                       </a:r>
                     </a:p>
                   </a:txBody>
-                  <a:tcPr marL="73152" marR="73152" marT="27432" marB="27432" anchor="ctr">
+                  <a:tcPr anchor="ctr" marL="73152" marR="73152" marT="27432" marB="27432">
                     <a:lnL w="0">
                       <a:noFill/>
                     </a:lnL>
@@ -7064,16 +6805,11 @@
                     </a:solidFill>
                   </a:tcPr>
                 </a:tc>
-                <a:extLst>
-                  <a:ext uri="{0D108BD9-81ED-4DB2-BD59-A6C34878D82A}">
-                    <a16:rowId xmlns:a16="http://schemas.microsoft.com/office/drawing/2014/main" val="10000"/>
-                  </a:ext>
-                </a:extLst>
               </a:tr>
               <a:tr h="338328">
                 <a:tc>
                   <a:txBody>
-                    <a:bodyPr/>
+                    <a:bodyPr wrap="square" anchor="ctr" lIns="73152" tIns="27432" rIns="73152" bIns="27432"/>
                     <a:lstStyle/>
                     <a:p>
                       <a:pPr algn="l"/>
@@ -7088,21 +6824,15 @@
                       </a:r>
                     </a:p>
                   </a:txBody>
-                  <a:tcPr marL="73152" marR="73152" marT="27432" marB="27432" anchor="ctr">
+                  <a:tcPr anchor="ctr" marL="73152" marR="73152" marT="27432" marB="27432">
                     <a:lnL w="0">
                       <a:noFill/>
                     </a:lnL>
                     <a:lnR w="0">
                       <a:noFill/>
                     </a:lnR>
-                    <a:lnT w="9525" cap="flat" cmpd="sng" algn="ctr">
-                      <a:solidFill>
-                        <a:srgbClr val="2B2B2B"/>
-                      </a:solidFill>
-                      <a:prstDash val="solid"/>
-                      <a:round/>
-                      <a:headEnd type="none" w="med" len="med"/>
-                      <a:tailEnd type="none" w="med" len="med"/>
+                    <a:lnT w="0">
+                      <a:noFill/>
                     </a:lnT>
                     <a:lnB w="9525">
                       <a:solidFill>
@@ -7116,7 +6846,7 @@
                 </a:tc>
                 <a:tc>
                   <a:txBody>
-                    <a:bodyPr/>
+                    <a:bodyPr wrap="square" anchor="ctr" lIns="73152" tIns="27432" rIns="73152" bIns="27432"/>
                     <a:lstStyle/>
                     <a:p>
                       <a:pPr algn="ctr"/>
@@ -7131,21 +6861,15 @@
                       </a:r>
                     </a:p>
                   </a:txBody>
-                  <a:tcPr marL="73152" marR="73152" marT="27432" marB="27432" anchor="ctr">
+                  <a:tcPr anchor="ctr" marL="73152" marR="73152" marT="27432" marB="27432">
                     <a:lnL w="0">
                       <a:noFill/>
                     </a:lnL>
                     <a:lnR w="0">
                       <a:noFill/>
                     </a:lnR>
-                    <a:lnT w="9525" cap="flat" cmpd="sng" algn="ctr">
-                      <a:solidFill>
-                        <a:srgbClr val="2B2B2B"/>
-                      </a:solidFill>
-                      <a:prstDash val="solid"/>
-                      <a:round/>
-                      <a:headEnd type="none" w="med" len="med"/>
-                      <a:tailEnd type="none" w="med" len="med"/>
+                    <a:lnT w="0">
+                      <a:noFill/>
                     </a:lnT>
                     <a:lnB w="9525">
                       <a:solidFill>
@@ -7159,7 +6883,7 @@
                 </a:tc>
                 <a:tc>
                   <a:txBody>
-                    <a:bodyPr/>
+                    <a:bodyPr wrap="square" anchor="ctr" lIns="73152" tIns="27432" rIns="73152" bIns="27432"/>
                     <a:lstStyle/>
                     <a:p>
                       <a:pPr algn="ctr"/>
@@ -7174,21 +6898,15 @@
                       </a:r>
                     </a:p>
                   </a:txBody>
-                  <a:tcPr marL="73152" marR="73152" marT="27432" marB="27432" anchor="ctr">
+                  <a:tcPr anchor="ctr" marL="73152" marR="73152" marT="27432" marB="27432">
                     <a:lnL w="0">
                       <a:noFill/>
                     </a:lnL>
                     <a:lnR w="0">
                       <a:noFill/>
                     </a:lnR>
-                    <a:lnT w="9525" cap="flat" cmpd="sng" algn="ctr">
-                      <a:solidFill>
-                        <a:srgbClr val="2B2B2B"/>
-                      </a:solidFill>
-                      <a:prstDash val="solid"/>
-                      <a:round/>
-                      <a:headEnd type="none" w="med" len="med"/>
-                      <a:tailEnd type="none" w="med" len="med"/>
+                    <a:lnT w="0">
+                      <a:noFill/>
                     </a:lnT>
                     <a:lnB w="9525">
                       <a:solidFill>
@@ -7200,16 +6918,11 @@
                     </a:solidFill>
                   </a:tcPr>
                 </a:tc>
-                <a:extLst>
-                  <a:ext uri="{0D108BD9-81ED-4DB2-BD59-A6C34878D82A}">
-                    <a16:rowId xmlns:a16="http://schemas.microsoft.com/office/drawing/2014/main" val="10001"/>
-                  </a:ext>
-                </a:extLst>
               </a:tr>
               <a:tr h="338328">
                 <a:tc>
                   <a:txBody>
-                    <a:bodyPr/>
+                    <a:bodyPr wrap="square" anchor="ctr" lIns="73152" tIns="27432" rIns="73152" bIns="27432"/>
                     <a:lstStyle/>
                     <a:p>
                       <a:pPr algn="l"/>
@@ -7224,21 +6937,15 @@
                       </a:r>
                     </a:p>
                   </a:txBody>
-                  <a:tcPr marL="73152" marR="73152" marT="27432" marB="27432" anchor="ctr">
+                  <a:tcPr anchor="ctr" marL="73152" marR="73152" marT="27432" marB="27432">
                     <a:lnL w="0">
                       <a:noFill/>
                     </a:lnL>
                     <a:lnR w="0">
                       <a:noFill/>
                     </a:lnR>
-                    <a:lnT w="9525" cap="flat" cmpd="sng" algn="ctr">
-                      <a:solidFill>
-                        <a:srgbClr val="D9D9D9"/>
-                      </a:solidFill>
-                      <a:prstDash val="solid"/>
-                      <a:round/>
-                      <a:headEnd type="none" w="med" len="med"/>
-                      <a:tailEnd type="none" w="med" len="med"/>
+                    <a:lnT w="0">
+                      <a:noFill/>
                     </a:lnT>
                     <a:lnB w="9525">
                       <a:solidFill>
@@ -7252,7 +6959,7 @@
                 </a:tc>
                 <a:tc>
                   <a:txBody>
-                    <a:bodyPr/>
+                    <a:bodyPr wrap="square" anchor="ctr" lIns="73152" tIns="27432" rIns="73152" bIns="27432"/>
                     <a:lstStyle/>
                     <a:p>
                       <a:pPr algn="ctr"/>
@@ -7267,21 +6974,15 @@
                       </a:r>
                     </a:p>
                   </a:txBody>
-                  <a:tcPr marL="73152" marR="73152" marT="27432" marB="27432" anchor="ctr">
+                  <a:tcPr anchor="ctr" marL="73152" marR="73152" marT="27432" marB="27432">
                     <a:lnL w="0">
                       <a:noFill/>
                     </a:lnL>
                     <a:lnR w="0">
                       <a:noFill/>
                     </a:lnR>
-                    <a:lnT w="9525" cap="flat" cmpd="sng" algn="ctr">
-                      <a:solidFill>
-                        <a:srgbClr val="D9D9D9"/>
-                      </a:solidFill>
-                      <a:prstDash val="solid"/>
-                      <a:round/>
-                      <a:headEnd type="none" w="med" len="med"/>
-                      <a:tailEnd type="none" w="med" len="med"/>
+                    <a:lnT w="0">
+                      <a:noFill/>
                     </a:lnT>
                     <a:lnB w="9525">
                       <a:solidFill>
@@ -7295,7 +6996,7 @@
                 </a:tc>
                 <a:tc>
                   <a:txBody>
-                    <a:bodyPr/>
+                    <a:bodyPr wrap="square" anchor="ctr" lIns="73152" tIns="27432" rIns="73152" bIns="27432"/>
                     <a:lstStyle/>
                     <a:p>
                       <a:pPr algn="ctr"/>
@@ -7310,21 +7011,15 @@
                       </a:r>
                     </a:p>
                   </a:txBody>
-                  <a:tcPr marL="73152" marR="73152" marT="27432" marB="27432" anchor="ctr">
+                  <a:tcPr anchor="ctr" marL="73152" marR="73152" marT="27432" marB="27432">
                     <a:lnL w="0">
                       <a:noFill/>
                     </a:lnL>
                     <a:lnR w="0">
                       <a:noFill/>
                     </a:lnR>
-                    <a:lnT w="9525" cap="flat" cmpd="sng" algn="ctr">
-                      <a:solidFill>
-                        <a:srgbClr val="D9D9D9"/>
-                      </a:solidFill>
-                      <a:prstDash val="solid"/>
-                      <a:round/>
-                      <a:headEnd type="none" w="med" len="med"/>
-                      <a:tailEnd type="none" w="med" len="med"/>
+                    <a:lnT w="0">
+                      <a:noFill/>
                     </a:lnT>
                     <a:lnB w="9525">
                       <a:solidFill>
@@ -7336,16 +7031,11 @@
                     </a:solidFill>
                   </a:tcPr>
                 </a:tc>
-                <a:extLst>
-                  <a:ext uri="{0D108BD9-81ED-4DB2-BD59-A6C34878D82A}">
-                    <a16:rowId xmlns:a16="http://schemas.microsoft.com/office/drawing/2014/main" val="10002"/>
-                  </a:ext>
-                </a:extLst>
               </a:tr>
               <a:tr h="338328">
                 <a:tc>
                   <a:txBody>
-                    <a:bodyPr/>
+                    <a:bodyPr wrap="square" anchor="ctr" lIns="73152" tIns="27432" rIns="73152" bIns="27432"/>
                     <a:lstStyle/>
                     <a:p>
                       <a:pPr algn="l"/>
@@ -7360,21 +7050,15 @@
                       </a:r>
                     </a:p>
                   </a:txBody>
-                  <a:tcPr marL="73152" marR="73152" marT="27432" marB="27432" anchor="ctr">
+                  <a:tcPr anchor="ctr" marL="73152" marR="73152" marT="27432" marB="27432">
                     <a:lnL w="0">
                       <a:noFill/>
                     </a:lnL>
                     <a:lnR w="0">
                       <a:noFill/>
                     </a:lnR>
-                    <a:lnT w="9525" cap="flat" cmpd="sng" algn="ctr">
-                      <a:solidFill>
-                        <a:srgbClr val="D9D9D9"/>
-                      </a:solidFill>
-                      <a:prstDash val="solid"/>
-                      <a:round/>
-                      <a:headEnd type="none" w="med" len="med"/>
-                      <a:tailEnd type="none" w="med" len="med"/>
+                    <a:lnT w="0">
+                      <a:noFill/>
                     </a:lnT>
                     <a:lnB w="9525">
                       <a:solidFill>
@@ -7388,7 +7072,7 @@
                 </a:tc>
                 <a:tc>
                   <a:txBody>
-                    <a:bodyPr/>
+                    <a:bodyPr wrap="square" anchor="ctr" lIns="73152" tIns="27432" rIns="73152" bIns="27432"/>
                     <a:lstStyle/>
                     <a:p>
                       <a:pPr algn="ctr"/>
@@ -7403,21 +7087,15 @@
                       </a:r>
                     </a:p>
                   </a:txBody>
-                  <a:tcPr marL="73152" marR="73152" marT="27432" marB="27432" anchor="ctr">
+                  <a:tcPr anchor="ctr" marL="73152" marR="73152" marT="27432" marB="27432">
                     <a:lnL w="0">
                       <a:noFill/>
                     </a:lnL>
                     <a:lnR w="0">
                       <a:noFill/>
                     </a:lnR>
-                    <a:lnT w="9525" cap="flat" cmpd="sng" algn="ctr">
-                      <a:solidFill>
-                        <a:srgbClr val="D9D9D9"/>
-                      </a:solidFill>
-                      <a:prstDash val="solid"/>
-                      <a:round/>
-                      <a:headEnd type="none" w="med" len="med"/>
-                      <a:tailEnd type="none" w="med" len="med"/>
+                    <a:lnT w="0">
+                      <a:noFill/>
                     </a:lnT>
                     <a:lnB w="9525">
                       <a:solidFill>
@@ -7431,7 +7109,7 @@
                 </a:tc>
                 <a:tc>
                   <a:txBody>
-                    <a:bodyPr/>
+                    <a:bodyPr wrap="square" anchor="ctr" lIns="73152" tIns="27432" rIns="73152" bIns="27432"/>
                     <a:lstStyle/>
                     <a:p>
                       <a:pPr algn="ctr"/>
@@ -7446,21 +7124,15 @@
                       </a:r>
                     </a:p>
                   </a:txBody>
-                  <a:tcPr marL="73152" marR="73152" marT="27432" marB="27432" anchor="ctr">
+                  <a:tcPr anchor="ctr" marL="73152" marR="73152" marT="27432" marB="27432">
                     <a:lnL w="0">
                       <a:noFill/>
                     </a:lnL>
                     <a:lnR w="0">
                       <a:noFill/>
                     </a:lnR>
-                    <a:lnT w="9525" cap="flat" cmpd="sng" algn="ctr">
-                      <a:solidFill>
-                        <a:srgbClr val="D9D9D9"/>
-                      </a:solidFill>
-                      <a:prstDash val="solid"/>
-                      <a:round/>
-                      <a:headEnd type="none" w="med" len="med"/>
-                      <a:tailEnd type="none" w="med" len="med"/>
+                    <a:lnT w="0">
+                      <a:noFill/>
                     </a:lnT>
                     <a:lnB w="9525">
                       <a:solidFill>
@@ -7472,16 +7144,11 @@
                     </a:solidFill>
                   </a:tcPr>
                 </a:tc>
-                <a:extLst>
-                  <a:ext uri="{0D108BD9-81ED-4DB2-BD59-A6C34878D82A}">
-                    <a16:rowId xmlns:a16="http://schemas.microsoft.com/office/drawing/2014/main" val="10003"/>
-                  </a:ext>
-                </a:extLst>
               </a:tr>
               <a:tr h="338328">
                 <a:tc>
                   <a:txBody>
-                    <a:bodyPr/>
+                    <a:bodyPr wrap="square" anchor="ctr" lIns="73152" tIns="27432" rIns="73152" bIns="27432"/>
                     <a:lstStyle/>
                     <a:p>
                       <a:pPr algn="l"/>
@@ -7496,21 +7163,15 @@
                       </a:r>
                     </a:p>
                   </a:txBody>
-                  <a:tcPr marL="73152" marR="73152" marT="27432" marB="27432" anchor="ctr">
+                  <a:tcPr anchor="ctr" marL="73152" marR="73152" marT="27432" marB="27432">
                     <a:lnL w="0">
                       <a:noFill/>
                     </a:lnL>
                     <a:lnR w="0">
                       <a:noFill/>
                     </a:lnR>
-                    <a:lnT w="9525" cap="flat" cmpd="sng" algn="ctr">
-                      <a:solidFill>
-                        <a:srgbClr val="D9D9D9"/>
-                      </a:solidFill>
-                      <a:prstDash val="solid"/>
-                      <a:round/>
-                      <a:headEnd type="none" w="med" len="med"/>
-                      <a:tailEnd type="none" w="med" len="med"/>
+                    <a:lnT w="0">
+                      <a:noFill/>
                     </a:lnT>
                     <a:lnB w="9525">
                       <a:solidFill>
@@ -7524,7 +7185,7 @@
                 </a:tc>
                 <a:tc>
                   <a:txBody>
-                    <a:bodyPr/>
+                    <a:bodyPr wrap="square" anchor="ctr" lIns="73152" tIns="27432" rIns="73152" bIns="27432"/>
                     <a:lstStyle/>
                     <a:p>
                       <a:pPr algn="ctr"/>
@@ -7539,21 +7200,15 @@
                       </a:r>
                     </a:p>
                   </a:txBody>
-                  <a:tcPr marL="73152" marR="73152" marT="27432" marB="27432" anchor="ctr">
+                  <a:tcPr anchor="ctr" marL="73152" marR="73152" marT="27432" marB="27432">
                     <a:lnL w="0">
                       <a:noFill/>
                     </a:lnL>
                     <a:lnR w="0">
                       <a:noFill/>
                     </a:lnR>
-                    <a:lnT w="9525" cap="flat" cmpd="sng" algn="ctr">
-                      <a:solidFill>
-                        <a:srgbClr val="D9D9D9"/>
-                      </a:solidFill>
-                      <a:prstDash val="solid"/>
-                      <a:round/>
-                      <a:headEnd type="none" w="med" len="med"/>
-                      <a:tailEnd type="none" w="med" len="med"/>
+                    <a:lnT w="0">
+                      <a:noFill/>
                     </a:lnT>
                     <a:lnB w="9525">
                       <a:solidFill>
@@ -7567,7 +7222,7 @@
                 </a:tc>
                 <a:tc>
                   <a:txBody>
-                    <a:bodyPr/>
+                    <a:bodyPr wrap="square" anchor="ctr" lIns="73152" tIns="27432" rIns="73152" bIns="27432"/>
                     <a:lstStyle/>
                     <a:p>
                       <a:pPr algn="ctr"/>
@@ -7582,21 +7237,15 @@
                       </a:r>
                     </a:p>
                   </a:txBody>
-                  <a:tcPr marL="73152" marR="73152" marT="27432" marB="27432" anchor="ctr">
+                  <a:tcPr anchor="ctr" marL="73152" marR="73152" marT="27432" marB="27432">
                     <a:lnL w="0">
                       <a:noFill/>
                     </a:lnL>
                     <a:lnR w="0">
                       <a:noFill/>
                     </a:lnR>
-                    <a:lnT w="9525" cap="flat" cmpd="sng" algn="ctr">
-                      <a:solidFill>
-                        <a:srgbClr val="D9D9D9"/>
-                      </a:solidFill>
-                      <a:prstDash val="solid"/>
-                      <a:round/>
-                      <a:headEnd type="none" w="med" len="med"/>
-                      <a:tailEnd type="none" w="med" len="med"/>
+                    <a:lnT w="0">
+                      <a:noFill/>
                     </a:lnT>
                     <a:lnB w="9525">
                       <a:solidFill>
@@ -7608,16 +7257,11 @@
                     </a:solidFill>
                   </a:tcPr>
                 </a:tc>
-                <a:extLst>
-                  <a:ext uri="{0D108BD9-81ED-4DB2-BD59-A6C34878D82A}">
-                    <a16:rowId xmlns:a16="http://schemas.microsoft.com/office/drawing/2014/main" val="10004"/>
-                  </a:ext>
-                </a:extLst>
               </a:tr>
               <a:tr h="338328">
                 <a:tc>
                   <a:txBody>
-                    <a:bodyPr/>
+                    <a:bodyPr wrap="square" anchor="ctr" lIns="73152" tIns="27432" rIns="73152" bIns="27432"/>
                     <a:lstStyle/>
                     <a:p>
                       <a:pPr algn="l"/>
@@ -7632,21 +7276,15 @@
                       </a:r>
                     </a:p>
                   </a:txBody>
-                  <a:tcPr marL="73152" marR="73152" marT="27432" marB="27432" anchor="ctr">
+                  <a:tcPr anchor="ctr" marL="73152" marR="73152" marT="27432" marB="27432">
                     <a:lnL w="0">
                       <a:noFill/>
                     </a:lnL>
                     <a:lnR w="0">
                       <a:noFill/>
                     </a:lnR>
-                    <a:lnT w="9525" cap="flat" cmpd="sng" algn="ctr">
-                      <a:solidFill>
-                        <a:srgbClr val="D9D9D9"/>
-                      </a:solidFill>
-                      <a:prstDash val="solid"/>
-                      <a:round/>
-                      <a:headEnd type="none" w="med" len="med"/>
-                      <a:tailEnd type="none" w="med" len="med"/>
+                    <a:lnT w="0">
+                      <a:noFill/>
                     </a:lnT>
                     <a:lnB w="9525">
                       <a:solidFill>
@@ -7660,7 +7298,7 @@
                 </a:tc>
                 <a:tc>
                   <a:txBody>
-                    <a:bodyPr/>
+                    <a:bodyPr wrap="square" anchor="ctr" lIns="73152" tIns="27432" rIns="73152" bIns="27432"/>
                     <a:lstStyle/>
                     <a:p>
                       <a:pPr algn="ctr"/>
@@ -7675,21 +7313,15 @@
                       </a:r>
                     </a:p>
                   </a:txBody>
-                  <a:tcPr marL="73152" marR="73152" marT="27432" marB="27432" anchor="ctr">
+                  <a:tcPr anchor="ctr" marL="73152" marR="73152" marT="27432" marB="27432">
                     <a:lnL w="0">
                       <a:noFill/>
                     </a:lnL>
                     <a:lnR w="0">
                       <a:noFill/>
                     </a:lnR>
-                    <a:lnT w="9525" cap="flat" cmpd="sng" algn="ctr">
-                      <a:solidFill>
-                        <a:srgbClr val="D9D9D9"/>
-                      </a:solidFill>
-                      <a:prstDash val="solid"/>
-                      <a:round/>
-                      <a:headEnd type="none" w="med" len="med"/>
-                      <a:tailEnd type="none" w="med" len="med"/>
+                    <a:lnT w="0">
+                      <a:noFill/>
                     </a:lnT>
                     <a:lnB w="9525">
                       <a:solidFill>
@@ -7703,7 +7335,7 @@
                 </a:tc>
                 <a:tc>
                   <a:txBody>
-                    <a:bodyPr/>
+                    <a:bodyPr wrap="square" anchor="ctr" lIns="73152" tIns="27432" rIns="73152" bIns="27432"/>
                     <a:lstStyle/>
                     <a:p>
                       <a:pPr algn="ctr"/>
@@ -7718,21 +7350,15 @@
                       </a:r>
                     </a:p>
                   </a:txBody>
-                  <a:tcPr marL="73152" marR="73152" marT="27432" marB="27432" anchor="ctr">
+                  <a:tcPr anchor="ctr" marL="73152" marR="73152" marT="27432" marB="27432">
                     <a:lnL w="0">
                       <a:noFill/>
                     </a:lnL>
                     <a:lnR w="0">
                       <a:noFill/>
                     </a:lnR>
-                    <a:lnT w="9525" cap="flat" cmpd="sng" algn="ctr">
-                      <a:solidFill>
-                        <a:srgbClr val="D9D9D9"/>
-                      </a:solidFill>
-                      <a:prstDash val="solid"/>
-                      <a:round/>
-                      <a:headEnd type="none" w="med" len="med"/>
-                      <a:tailEnd type="none" w="med" len="med"/>
+                    <a:lnT w="0">
+                      <a:noFill/>
                     </a:lnT>
                     <a:lnB w="9525">
                       <a:solidFill>
@@ -7744,11 +7370,6 @@
                     </a:solidFill>
                   </a:tcPr>
                 </a:tc>
-                <a:extLst>
-                  <a:ext uri="{0D108BD9-81ED-4DB2-BD59-A6C34878D82A}">
-                    <a16:rowId xmlns:a16="http://schemas.microsoft.com/office/drawing/2014/main" val="10005"/>
-                  </a:ext>
-                </a:extLst>
               </a:tr>
             </a:tbl>
           </a:graphicData>
@@ -7763,7 +7384,7 @@
 </file>
 
 <file path=ppt/slides/slide3.xml><?xml version="1.0" encoding="utf-8"?>
-<p:sld xmlns:a="http://schemas.openxmlformats.org/drawingml/2006/main" xmlns:r="http://schemas.openxmlformats.org/officeDocument/2006/relationships" xmlns:p="http://schemas.openxmlformats.org/presentationml/2006/main">
+<p:sld xmlns:a="http://schemas.openxmlformats.org/drawingml/2006/main" xmlns:p="http://schemas.openxmlformats.org/presentationml/2006/main" xmlns:r="http://schemas.openxmlformats.org/officeDocument/2006/relationships">
   <p:cSld>
     <p:spTree>
       <p:nvGrpSpPr>
@@ -7771,14 +7392,7 @@
         <p:cNvGrpSpPr/>
         <p:nvPr/>
       </p:nvGrpSpPr>
-      <p:grpSpPr>
-        <a:xfrm>
-          <a:off x="0" y="0"/>
-          <a:ext cx="0" cy="0"/>
-          <a:chOff x="0" y="0"/>
-          <a:chExt cx="0" cy="0"/>
-        </a:xfrm>
-      </p:grpSpPr>
+      <p:grpSpPr/>
       <p:sp>
         <p:nvSpPr>
           <p:cNvPr id="2" name="Title 1"/>
@@ -7796,7 +7410,7 @@
           </a:xfrm>
         </p:spPr>
         <p:txBody>
-          <a:bodyPr wrap="square" lIns="0" tIns="0" rIns="0" bIns="0" anchor="ctr"/>
+          <a:bodyPr wrap="square" anchor="ctr" lIns="0" tIns="0" rIns="0" bIns="0"/>
           <a:lstStyle/>
           <a:p>
             <a:pPr algn="ctr"/>
@@ -7829,7 +7443,7 @@
           <a:noFill/>
         </p:spPr>
         <p:txBody>
-          <a:bodyPr wrap="square" lIns="0" tIns="0" rIns="0" bIns="0" anchor="t">
+          <a:bodyPr wrap="square" anchor="t" lIns="0" tIns="0" rIns="0" bIns="0">
             <a:spAutoFit/>
           </a:bodyPr>
           <a:lstStyle/>
@@ -7888,7 +7502,6 @@
           <a:lstStyle/>
           <a:p>
             <a:pPr algn="ctr"/>
-            <a:endParaRPr/>
           </a:p>
         </p:txBody>
       </p:sp>
@@ -7931,7 +7544,7 @@
           </a:fontRef>
         </p:style>
         <p:txBody>
-          <a:bodyPr wrap="square" lIns="502920" tIns="18288" rIns="45720" bIns="18288" rtlCol="0" anchor="ctr"/>
+          <a:bodyPr rtlCol="0" anchor="ctr" wrap="square" lIns="502920" tIns="18288" rIns="45720" bIns="18288"/>
           <a:lstStyle/>
           <a:p>
             <a:pPr algn="l"/>
@@ -7986,7 +7599,7 @@
           </a:fontRef>
         </p:style>
         <p:txBody>
-          <a:bodyPr wrap="none" lIns="0" tIns="0" rIns="0" bIns="0" rtlCol="0" anchor="ctr"/>
+          <a:bodyPr rtlCol="0" anchor="ctr" wrap="none" lIns="0" tIns="0" rIns="0" bIns="0"/>
           <a:lstStyle/>
           <a:p>
             <a:pPr algn="ctr"/>
@@ -8019,7 +7632,7 @@
           <a:noFill/>
         </p:spPr>
         <p:txBody>
-          <a:bodyPr wrap="square" lIns="0" tIns="0" rIns="0" bIns="0" anchor="t">
+          <a:bodyPr wrap="square" anchor="t" lIns="0" tIns="0" rIns="0" bIns="0">
             <a:spAutoFit/>
           </a:bodyPr>
           <a:lstStyle/>
@@ -8114,7 +7727,6 @@
           <a:lstStyle/>
           <a:p>
             <a:pPr algn="ctr"/>
-            <a:endParaRPr/>
           </a:p>
         </p:txBody>
       </p:sp>
@@ -8157,7 +7769,7 @@
           </a:fontRef>
         </p:style>
         <p:txBody>
-          <a:bodyPr wrap="square" lIns="502920" tIns="18288" rIns="45720" bIns="18288" rtlCol="0" anchor="ctr"/>
+          <a:bodyPr rtlCol="0" anchor="ctr" wrap="square" lIns="502920" tIns="18288" rIns="45720" bIns="18288"/>
           <a:lstStyle/>
           <a:p>
             <a:pPr algn="l"/>
@@ -8212,7 +7824,7 @@
           </a:fontRef>
         </p:style>
         <p:txBody>
-          <a:bodyPr wrap="none" lIns="0" tIns="0" rIns="0" bIns="0" rtlCol="0" anchor="ctr"/>
+          <a:bodyPr rtlCol="0" anchor="ctr" wrap="none" lIns="0" tIns="0" rIns="0" bIns="0"/>
           <a:lstStyle/>
           <a:p>
             <a:pPr algn="ctr"/>
@@ -8245,7 +7857,7 @@
           <a:noFill/>
         </p:spPr>
         <p:txBody>
-          <a:bodyPr wrap="square" lIns="0" tIns="0" rIns="0" bIns="0" anchor="t">
+          <a:bodyPr wrap="square" anchor="t" lIns="0" tIns="0" rIns="0" bIns="0">
             <a:spAutoFit/>
           </a:bodyPr>
           <a:lstStyle/>
@@ -8340,7 +7952,6 @@
           <a:lstStyle/>
           <a:p>
             <a:pPr algn="ctr"/>
-            <a:endParaRPr/>
           </a:p>
         </p:txBody>
       </p:sp>
@@ -8383,7 +7994,7 @@
           </a:fontRef>
         </p:style>
         <p:txBody>
-          <a:bodyPr wrap="square" lIns="502920" tIns="18288" rIns="45720" bIns="18288" rtlCol="0" anchor="ctr"/>
+          <a:bodyPr rtlCol="0" anchor="ctr" wrap="square" lIns="502920" tIns="18288" rIns="45720" bIns="18288"/>
           <a:lstStyle/>
           <a:p>
             <a:pPr algn="l"/>
@@ -8438,7 +8049,7 @@
           </a:fontRef>
         </p:style>
         <p:txBody>
-          <a:bodyPr wrap="none" lIns="0" tIns="0" rIns="0" bIns="0" rtlCol="0" anchor="ctr"/>
+          <a:bodyPr rtlCol="0" anchor="ctr" wrap="none" lIns="0" tIns="0" rIns="0" bIns="0"/>
           <a:lstStyle/>
           <a:p>
             <a:pPr algn="ctr"/>
@@ -8471,7 +8082,7 @@
           <a:noFill/>
         </p:spPr>
         <p:txBody>
-          <a:bodyPr wrap="square" lIns="0" tIns="0" rIns="0" bIns="0" anchor="t">
+          <a:bodyPr wrap="square" anchor="t" lIns="0" tIns="0" rIns="0" bIns="0">
             <a:spAutoFit/>
           </a:bodyPr>
           <a:lstStyle/>
@@ -8566,7 +8177,6 @@
           <a:lstStyle/>
           <a:p>
             <a:pPr algn="ctr"/>
-            <a:endParaRPr/>
           </a:p>
         </p:txBody>
       </p:sp>
@@ -8609,7 +8219,7 @@
           </a:fontRef>
         </p:style>
         <p:txBody>
-          <a:bodyPr wrap="square" lIns="502920" tIns="18288" rIns="45720" bIns="18288" rtlCol="0" anchor="ctr"/>
+          <a:bodyPr rtlCol="0" anchor="ctr" wrap="square" lIns="502920" tIns="18288" rIns="45720" bIns="18288"/>
           <a:lstStyle/>
           <a:p>
             <a:pPr algn="l"/>
@@ -8664,7 +8274,7 @@
           </a:fontRef>
         </p:style>
         <p:txBody>
-          <a:bodyPr wrap="none" lIns="0" tIns="0" rIns="0" bIns="0" rtlCol="0" anchor="ctr"/>
+          <a:bodyPr rtlCol="0" anchor="ctr" wrap="none" lIns="0" tIns="0" rIns="0" bIns="0"/>
           <a:lstStyle/>
           <a:p>
             <a:pPr algn="ctr"/>
@@ -8697,7 +8307,7 @@
           <a:noFill/>
         </p:spPr>
         <p:txBody>
-          <a:bodyPr wrap="square" lIns="0" tIns="0" rIns="0" bIns="0" anchor="t">
+          <a:bodyPr wrap="square" anchor="t" lIns="0" tIns="0" rIns="0" bIns="0">
             <a:spAutoFit/>
           </a:bodyPr>
           <a:lstStyle/>
@@ -8792,7 +8402,6 @@
           <a:lstStyle/>
           <a:p>
             <a:pPr algn="ctr"/>
-            <a:endParaRPr/>
           </a:p>
         </p:txBody>
       </p:sp>
@@ -8835,7 +8444,7 @@
           </a:fontRef>
         </p:style>
         <p:txBody>
-          <a:bodyPr wrap="square" lIns="502920" tIns="18288" rIns="45720" bIns="18288" rtlCol="0" anchor="ctr"/>
+          <a:bodyPr rtlCol="0" anchor="ctr" wrap="square" lIns="502920" tIns="18288" rIns="45720" bIns="18288"/>
           <a:lstStyle/>
           <a:p>
             <a:pPr algn="l"/>
@@ -8890,7 +8499,7 @@
           </a:fontRef>
         </p:style>
         <p:txBody>
-          <a:bodyPr wrap="none" lIns="0" tIns="0" rIns="0" bIns="0" rtlCol="0" anchor="ctr"/>
+          <a:bodyPr rtlCol="0" anchor="ctr" wrap="none" lIns="0" tIns="0" rIns="0" bIns="0"/>
           <a:lstStyle/>
           <a:p>
             <a:pPr algn="ctr"/>
@@ -8923,7 +8532,7 @@
           <a:noFill/>
         </p:spPr>
         <p:txBody>
-          <a:bodyPr wrap="square" lIns="0" tIns="0" rIns="0" bIns="0" anchor="t">
+          <a:bodyPr wrap="square" anchor="t" lIns="0" tIns="0" rIns="0" bIns="0">
             <a:spAutoFit/>
           </a:bodyPr>
           <a:lstStyle/>
@@ -9018,7 +8627,6 @@
           <a:lstStyle/>
           <a:p>
             <a:pPr algn="ctr"/>
-            <a:endParaRPr/>
           </a:p>
         </p:txBody>
       </p:sp>
@@ -9061,7 +8669,7 @@
           </a:fontRef>
         </p:style>
         <p:txBody>
-          <a:bodyPr wrap="square" lIns="502920" tIns="18288" rIns="45720" bIns="18288" rtlCol="0" anchor="ctr"/>
+          <a:bodyPr rtlCol="0" anchor="ctr" wrap="square" lIns="502920" tIns="18288" rIns="45720" bIns="18288"/>
           <a:lstStyle/>
           <a:p>
             <a:pPr algn="l"/>
@@ -9116,7 +8724,7 @@
           </a:fontRef>
         </p:style>
         <p:txBody>
-          <a:bodyPr wrap="none" lIns="0" tIns="0" rIns="0" bIns="0" rtlCol="0" anchor="ctr"/>
+          <a:bodyPr rtlCol="0" anchor="ctr" wrap="none" lIns="0" tIns="0" rIns="0" bIns="0"/>
           <a:lstStyle/>
           <a:p>
             <a:pPr algn="ctr"/>
@@ -9149,7 +8757,7 @@
           <a:noFill/>
         </p:spPr>
         <p:txBody>
-          <a:bodyPr wrap="square" lIns="0" tIns="0" rIns="0" bIns="0" anchor="t">
+          <a:bodyPr wrap="square" anchor="t" lIns="0" tIns="0" rIns="0" bIns="0">
             <a:spAutoFit/>
           </a:bodyPr>
           <a:lstStyle/>
@@ -9184,7 +8792,7 @@
           <a:noFill/>
         </p:spPr>
         <p:txBody>
-          <a:bodyPr wrap="square" lIns="0" tIns="0" rIns="0" bIns="0" anchor="t">
+          <a:bodyPr wrap="square" anchor="t" lIns="0" tIns="0" rIns="0" bIns="0">
             <a:spAutoFit/>
           </a:bodyPr>
           <a:lstStyle/>
@@ -9219,7 +8827,7 @@
           <a:noFill/>
         </p:spPr>
         <p:txBody>
-          <a:bodyPr wrap="square" lIns="0" tIns="0" rIns="0" bIns="0" anchor="t">
+          <a:bodyPr wrap="square" anchor="t" lIns="0" tIns="0" rIns="0" bIns="0">
             <a:spAutoFit/>
           </a:bodyPr>
           <a:lstStyle/>
@@ -9276,7 +8884,7 @@
           </a:fontRef>
         </p:style>
         <p:txBody>
-          <a:bodyPr wrap="square" lIns="73152" tIns="36576" rIns="73152" bIns="36576" rtlCol="0" anchor="ctr"/>
+          <a:bodyPr rtlCol="0" anchor="ctr" wrap="square" lIns="73152" tIns="36576" rIns="73152" bIns="36576"/>
           <a:lstStyle/>
           <a:p>
             <a:pPr algn="ctr">
@@ -9345,18 +8953,34 @@
           </a:fontRef>
         </p:style>
         <p:txBody>
-          <a:bodyPr wrap="square" lIns="36576" tIns="18288" rIns="36576" bIns="18288" rtlCol="0" anchor="ctr"/>
-          <a:lstStyle/>
+          <a:bodyPr rtlCol="0" anchor="ctr" wrap="square" lIns="36576" tIns="18288" rIns="36576" bIns="18288"/>
+          <a:lstStyle/>
+          <a:p>
+            <a:pPr algn="ctr">
+              <a:spcAft>
+                <a:spcPts val="100"/>
+              </a:spcAft>
+            </a:pPr>
+            <a:r>
+              <a:rPr sz="1150" b="0" i="0">
+                <a:solidFill>
+                  <a:srgbClr val="1A1A1A"/>
+                </a:solidFill>
+                <a:latin typeface="Times New Roman"/>
+              </a:rPr>
+              <a:t>Data copy 1</a:t>
+            </a:r>
+          </a:p>
           <a:p>
             <a:pPr algn="ctr"/>
             <a:r>
-              <a:rPr sz="1200" b="0" i="0">
-                <a:solidFill>
-                  <a:srgbClr val="1A1A1A"/>
+              <a:rPr sz="750" b="0" i="0">
+                <a:solidFill>
+                  <a:srgbClr val="555555"/>
                 </a:solidFill>
                 <a:latin typeface="Times New Roman"/>
               </a:rPr>
-              <a:t>Bootstrap sample 1</a:t>
+              <a:t>rows drawn at random</a:t>
             </a:r>
           </a:p>
         </p:txBody>
@@ -9440,7 +9064,6 @@
           <a:lstStyle/>
           <a:p>
             <a:pPr algn="ctr"/>
-            <a:endParaRPr/>
           </a:p>
         </p:txBody>
       </p:sp>
@@ -9557,7 +9180,6 @@
           <a:lstStyle/>
           <a:p>
             <a:pPr algn="ctr"/>
-            <a:endParaRPr/>
           </a:p>
         </p:txBody>
       </p:sp>
@@ -9604,7 +9226,6 @@
           <a:lstStyle/>
           <a:p>
             <a:pPr algn="ctr"/>
-            <a:endParaRPr/>
           </a:p>
         </p:txBody>
       </p:sp>
@@ -9651,7 +9272,6 @@
           <a:lstStyle/>
           <a:p>
             <a:pPr algn="ctr"/>
-            <a:endParaRPr/>
           </a:p>
         </p:txBody>
       </p:sp>
@@ -9730,7 +9350,7 @@
           </a:fontRef>
         </p:style>
         <p:txBody>
-          <a:bodyPr wrap="square" lIns="18288" tIns="18288" rIns="18288" bIns="18288" rtlCol="0" anchor="ctr"/>
+          <a:bodyPr rtlCol="0" anchor="ctr" wrap="square" lIns="18288" tIns="18288" rIns="18288" bIns="18288"/>
           <a:lstStyle/>
           <a:p>
             <a:pPr algn="ctr"/>
@@ -9819,18 +9439,34 @@
           </a:fontRef>
         </p:style>
         <p:txBody>
-          <a:bodyPr wrap="square" lIns="36576" tIns="18288" rIns="36576" bIns="18288" rtlCol="0" anchor="ctr"/>
-          <a:lstStyle/>
+          <a:bodyPr rtlCol="0" anchor="ctr" wrap="square" lIns="36576" tIns="18288" rIns="36576" bIns="18288"/>
+          <a:lstStyle/>
+          <a:p>
+            <a:pPr algn="ctr">
+              <a:spcAft>
+                <a:spcPts val="100"/>
+              </a:spcAft>
+            </a:pPr>
+            <a:r>
+              <a:rPr sz="1150" b="0" i="0">
+                <a:solidFill>
+                  <a:srgbClr val="1A1A1A"/>
+                </a:solidFill>
+                <a:latin typeface="Times New Roman"/>
+              </a:rPr>
+              <a:t>Data copy 2</a:t>
+            </a:r>
+          </a:p>
           <a:p>
             <a:pPr algn="ctr"/>
             <a:r>
-              <a:rPr sz="1200" b="0" i="0">
-                <a:solidFill>
-                  <a:srgbClr val="1A1A1A"/>
+              <a:rPr sz="750" b="0" i="0">
+                <a:solidFill>
+                  <a:srgbClr val="555555"/>
                 </a:solidFill>
                 <a:latin typeface="Times New Roman"/>
               </a:rPr>
-              <a:t>Bootstrap sample 2</a:t>
+              <a:t>some twice, some left out</a:t>
             </a:r>
           </a:p>
         </p:txBody>
@@ -9914,7 +9550,6 @@
           <a:lstStyle/>
           <a:p>
             <a:pPr algn="ctr"/>
-            <a:endParaRPr/>
           </a:p>
         </p:txBody>
       </p:sp>
@@ -10031,7 +9666,6 @@
           <a:lstStyle/>
           <a:p>
             <a:pPr algn="ctr"/>
-            <a:endParaRPr/>
           </a:p>
         </p:txBody>
       </p:sp>
@@ -10078,7 +9712,6 @@
           <a:lstStyle/>
           <a:p>
             <a:pPr algn="ctr"/>
-            <a:endParaRPr/>
           </a:p>
         </p:txBody>
       </p:sp>
@@ -10125,7 +9758,6 @@
           <a:lstStyle/>
           <a:p>
             <a:pPr algn="ctr"/>
-            <a:endParaRPr/>
           </a:p>
         </p:txBody>
       </p:sp>
@@ -10204,7 +9836,7 @@
           </a:fontRef>
         </p:style>
         <p:txBody>
-          <a:bodyPr wrap="square" lIns="18288" tIns="18288" rIns="18288" bIns="18288" rtlCol="0" anchor="ctr"/>
+          <a:bodyPr rtlCol="0" anchor="ctr" wrap="square" lIns="18288" tIns="18288" rIns="18288" bIns="18288"/>
           <a:lstStyle/>
           <a:p>
             <a:pPr algn="ctr"/>
@@ -10293,18 +9925,34 @@
           </a:fontRef>
         </p:style>
         <p:txBody>
-          <a:bodyPr wrap="square" lIns="36576" tIns="18288" rIns="36576" bIns="18288" rtlCol="0" anchor="ctr"/>
-          <a:lstStyle/>
+          <a:bodyPr rtlCol="0" anchor="ctr" wrap="square" lIns="36576" tIns="18288" rIns="36576" bIns="18288"/>
+          <a:lstStyle/>
+          <a:p>
+            <a:pPr algn="ctr">
+              <a:spcAft>
+                <a:spcPts val="100"/>
+              </a:spcAft>
+            </a:pPr>
+            <a:r>
+              <a:rPr sz="1150" b="0" i="0">
+                <a:solidFill>
+                  <a:srgbClr val="1A1A1A"/>
+                </a:solidFill>
+                <a:latin typeface="Times New Roman"/>
+              </a:rPr>
+              <a:t>Data copy 300</a:t>
+            </a:r>
+          </a:p>
           <a:p>
             <a:pPr algn="ctr"/>
             <a:r>
-              <a:rPr sz="1200" b="0" i="0">
-                <a:solidFill>
-                  <a:srgbClr val="1A1A1A"/>
+              <a:rPr sz="750" b="0" i="0">
+                <a:solidFill>
+                  <a:srgbClr val="555555"/>
                 </a:solidFill>
                 <a:latin typeface="Times New Roman"/>
               </a:rPr>
-              <a:t>Bootstrap sample 300</a:t>
+              <a:t>every tree gets its own</a:t>
             </a:r>
           </a:p>
         </p:txBody>
@@ -10388,7 +10036,6 @@
           <a:lstStyle/>
           <a:p>
             <a:pPr algn="ctr"/>
-            <a:endParaRPr/>
           </a:p>
         </p:txBody>
       </p:sp>
@@ -10505,7 +10152,6 @@
           <a:lstStyle/>
           <a:p>
             <a:pPr algn="ctr"/>
-            <a:endParaRPr/>
           </a:p>
         </p:txBody>
       </p:sp>
@@ -10552,7 +10198,6 @@
           <a:lstStyle/>
           <a:p>
             <a:pPr algn="ctr"/>
-            <a:endParaRPr/>
           </a:p>
         </p:txBody>
       </p:sp>
@@ -10599,7 +10244,6 @@
           <a:lstStyle/>
           <a:p>
             <a:pPr algn="ctr"/>
-            <a:endParaRPr/>
           </a:p>
         </p:txBody>
       </p:sp>
@@ -10678,7 +10322,7 @@
           </a:fontRef>
         </p:style>
         <p:txBody>
-          <a:bodyPr wrap="square" lIns="18288" tIns="18288" rIns="18288" bIns="18288" rtlCol="0" anchor="ctr"/>
+          <a:bodyPr rtlCol="0" anchor="ctr" wrap="square" lIns="18288" tIns="18288" rIns="18288" bIns="18288"/>
           <a:lstStyle/>
           <a:p>
             <a:pPr algn="ctr"/>
@@ -10747,7 +10391,7 @@
           <a:noFill/>
         </p:spPr>
         <p:txBody>
-          <a:bodyPr wrap="square" lIns="0" tIns="0" rIns="0" bIns="0" anchor="ctr">
+          <a:bodyPr wrap="square" anchor="ctr" lIns="0" tIns="0" rIns="0" bIns="0">
             <a:spAutoFit/>
           </a:bodyPr>
           <a:lstStyle/>
@@ -10760,7 +10404,7 @@
                 </a:solidFill>
                 <a:latin typeface="Times New Roman"/>
               </a:rPr>
-              <a:t>â‹®</a:t>
+              <a:t>⋮</a:t>
             </a:r>
           </a:p>
         </p:txBody>
@@ -10804,7 +10448,7 @@
           </a:fontRef>
         </p:style>
         <p:txBody>
-          <a:bodyPr wrap="square" lIns="54864" tIns="36576" rIns="54864" bIns="36576" rtlCol="0" anchor="ctr"/>
+          <a:bodyPr rtlCol="0" anchor="ctr" wrap="square" lIns="54864" tIns="36576" rIns="54864" bIns="36576"/>
           <a:lstStyle/>
           <a:p>
             <a:pPr algn="ctr">
@@ -11019,7 +10663,7 @@
           </a:fontRef>
         </p:style>
         <p:txBody>
-          <a:bodyPr wrap="square" lIns="73152" tIns="36576" rIns="73152" bIns="36576" rtlCol="0" anchor="ctr"/>
+          <a:bodyPr rtlCol="0" anchor="ctr" wrap="square" lIns="73152" tIns="36576" rIns="73152" bIns="36576"/>
           <a:lstStyle/>
           <a:p>
             <a:pPr algn="ctr">
@@ -11034,7 +10678,7 @@
                 </a:solidFill>
                 <a:latin typeface="Times New Roman"/>
               </a:rPr>
-              <a:t>â‰¥ 0.2302</a:t>
+              <a:t>≥ 0.2302</a:t>
             </a:r>
           </a:p>
           <a:p>
@@ -11068,7 +10712,7 @@
           <a:noFill/>
         </p:spPr>
         <p:txBody>
-          <a:bodyPr wrap="square" lIns="0" tIns="0" rIns="0" bIns="0" anchor="t">
+          <a:bodyPr wrap="square" anchor="t" lIns="0" tIns="0" rIns="0" bIns="0">
             <a:spAutoFit/>
           </a:bodyPr>
           <a:lstStyle/>
@@ -11125,7 +10769,7 @@
           </a:fontRef>
         </p:style>
         <p:txBody>
-          <a:bodyPr wrap="none" lIns="0" tIns="0" rIns="0" bIns="0" rtlCol="0" anchor="ctr"/>
+          <a:bodyPr rtlCol="0" anchor="ctr" wrap="none" lIns="0" tIns="0" rIns="0" bIns="0"/>
           <a:lstStyle/>
           <a:p>
             <a:pPr algn="ctr"/>
@@ -11158,7 +10802,7 @@
           <a:noFill/>
         </p:spPr>
         <p:txBody>
-          <a:bodyPr wrap="square" lIns="0" tIns="0" rIns="0" bIns="0" anchor="t">
+          <a:bodyPr wrap="square" anchor="t" lIns="0" tIns="0" rIns="0" bIns="0">
             <a:spAutoFit/>
           </a:bodyPr>
           <a:lstStyle/>
@@ -11231,7 +10875,7 @@
           </a:fontRef>
         </p:style>
         <p:txBody>
-          <a:bodyPr wrap="none" lIns="0" tIns="0" rIns="0" bIns="0" rtlCol="0" anchor="ctr"/>
+          <a:bodyPr rtlCol="0" anchor="ctr" wrap="none" lIns="0" tIns="0" rIns="0" bIns="0"/>
           <a:lstStyle/>
           <a:p>
             <a:pPr algn="ctr"/>
@@ -11264,7 +10908,7 @@
           <a:noFill/>
         </p:spPr>
         <p:txBody>
-          <a:bodyPr wrap="square" lIns="0" tIns="0" rIns="0" bIns="0" anchor="t">
+          <a:bodyPr wrap="square" anchor="t" lIns="0" tIns="0" rIns="0" bIns="0">
             <a:spAutoFit/>
           </a:bodyPr>
           <a:lstStyle/>
@@ -11293,7 +10937,7 @@
                 </a:solidFill>
                 <a:latin typeface="Times New Roman"/>
               </a:rPr>
-              <a:t>PR-AUC stayed near 0.3776: it only slides along the same precisionâ€“recall curve</a:t>
+              <a:t>PR-AUC stayed near 0.3776: it only slides along the same precision–recall curve</a:t>
             </a:r>
           </a:p>
         </p:txBody>
@@ -11337,7 +10981,7 @@
           </a:fontRef>
         </p:style>
         <p:txBody>
-          <a:bodyPr wrap="none" lIns="0" tIns="0" rIns="0" bIns="0" rtlCol="0" anchor="ctr"/>
+          <a:bodyPr rtlCol="0" anchor="ctr" wrap="none" lIns="0" tIns="0" rIns="0" bIns="0"/>
           <a:lstStyle/>
           <a:p>
             <a:pPr algn="ctr"/>
@@ -11370,7 +11014,7 @@
           <a:noFill/>
         </p:spPr>
         <p:txBody>
-          <a:bodyPr wrap="square" lIns="0" tIns="0" rIns="0" bIns="0" anchor="t">
+          <a:bodyPr wrap="square" anchor="t" lIns="0" tIns="0" rIns="0" bIns="0">
             <a:spAutoFit/>
           </a:bodyPr>
           <a:lstStyle/>
@@ -11443,7 +11087,7 @@
           </a:fontRef>
         </p:style>
         <p:txBody>
-          <a:bodyPr wrap="none" lIns="0" tIns="0" rIns="0" bIns="0" rtlCol="0" anchor="ctr"/>
+          <a:bodyPr rtlCol="0" anchor="ctr" wrap="none" lIns="0" tIns="0" rIns="0" bIns="0"/>
           <a:lstStyle/>
           <a:p>
             <a:pPr algn="ctr"/>
@@ -11476,7 +11120,7 @@
           <a:noFill/>
         </p:spPr>
         <p:txBody>
-          <a:bodyPr wrap="square" lIns="0" tIns="0" rIns="0" bIns="0" anchor="t">
+          <a:bodyPr wrap="square" anchor="t" lIns="0" tIns="0" rIns="0" bIns="0">
             <a:spAutoFit/>
           </a:bodyPr>
           <a:lstStyle/>
@@ -11519,7 +11163,7 @@
 </file>
 
 <file path=ppt/slides/slide4.xml><?xml version="1.0" encoding="utf-8"?>
-<p:sld xmlns:a="http://schemas.openxmlformats.org/drawingml/2006/main" xmlns:r="http://schemas.openxmlformats.org/officeDocument/2006/relationships" xmlns:p="http://schemas.openxmlformats.org/presentationml/2006/main">
+<p:sld xmlns:a="http://schemas.openxmlformats.org/drawingml/2006/main" xmlns:p="http://schemas.openxmlformats.org/presentationml/2006/main" xmlns:r="http://schemas.openxmlformats.org/officeDocument/2006/relationships">
   <p:cSld>
     <p:spTree>
       <p:nvGrpSpPr>
@@ -11527,14 +11171,7 @@
         <p:cNvGrpSpPr/>
         <p:nvPr/>
       </p:nvGrpSpPr>
-      <p:grpSpPr>
-        <a:xfrm>
-          <a:off x="0" y="0"/>
-          <a:ext cx="0" cy="0"/>
-          <a:chOff x="0" y="0"/>
-          <a:chExt cx="0" cy="0"/>
-        </a:xfrm>
-      </p:grpSpPr>
+      <p:grpSpPr/>
       <p:sp>
         <p:nvSpPr>
           <p:cNvPr id="2" name="Title 1"/>
@@ -11552,7 +11189,7 @@
           </a:xfrm>
         </p:spPr>
         <p:txBody>
-          <a:bodyPr wrap="square" lIns="0" tIns="0" rIns="0" bIns="0" anchor="ctr"/>
+          <a:bodyPr wrap="square" anchor="ctr" lIns="0" tIns="0" rIns="0" bIns="0"/>
           <a:lstStyle/>
           <a:p>
             <a:pPr algn="ctr"/>
@@ -11585,7 +11222,7 @@
           <a:noFill/>
         </p:spPr>
         <p:txBody>
-          <a:bodyPr wrap="square" lIns="0" tIns="0" rIns="0" bIns="0" anchor="t">
+          <a:bodyPr wrap="square" anchor="t" lIns="0" tIns="0" rIns="0" bIns="0">
             <a:spAutoFit/>
           </a:bodyPr>
           <a:lstStyle/>
@@ -11642,7 +11279,7 @@
           </a:fontRef>
         </p:style>
         <p:txBody>
-          <a:bodyPr wrap="square" lIns="45720" tIns="27432" rIns="45720" bIns="27432" rtlCol="0" anchor="ctr"/>
+          <a:bodyPr rtlCol="0" anchor="ctr" wrap="square" lIns="45720" tIns="27432" rIns="45720" bIns="27432"/>
           <a:lstStyle/>
           <a:p>
             <a:pPr algn="ctr"/>
@@ -11721,7 +11358,7 @@
           </a:fontRef>
         </p:style>
         <p:txBody>
-          <a:bodyPr wrap="square" lIns="45720" tIns="27432" rIns="45720" bIns="27432" rtlCol="0" anchor="ctr"/>
+          <a:bodyPr rtlCol="0" anchor="ctr" wrap="square" lIns="45720" tIns="27432" rIns="45720" bIns="27432"/>
           <a:lstStyle/>
           <a:p>
             <a:pPr algn="ctr"/>
@@ -11800,7 +11437,7 @@
           </a:fontRef>
         </p:style>
         <p:txBody>
-          <a:bodyPr wrap="square" lIns="45720" tIns="27432" rIns="45720" bIns="27432" rtlCol="0" anchor="ctr"/>
+          <a:bodyPr rtlCol="0" anchor="ctr" wrap="square" lIns="45720" tIns="27432" rIns="45720" bIns="27432"/>
           <a:lstStyle/>
           <a:p>
             <a:pPr algn="ctr"/>
@@ -11879,7 +11516,7 @@
           </a:fontRef>
         </p:style>
         <p:txBody>
-          <a:bodyPr wrap="square" lIns="45720" tIns="27432" rIns="45720" bIns="27432" rtlCol="0" anchor="ctr"/>
+          <a:bodyPr rtlCol="0" anchor="ctr" wrap="square" lIns="45720" tIns="27432" rIns="45720" bIns="27432"/>
           <a:lstStyle/>
           <a:p>
             <a:pPr algn="ctr"/>
@@ -11958,7 +11595,7 @@
           </a:fontRef>
         </p:style>
         <p:txBody>
-          <a:bodyPr wrap="square" lIns="45720" tIns="27432" rIns="45720" bIns="27432" rtlCol="0" anchor="ctr"/>
+          <a:bodyPr rtlCol="0" anchor="ctr" wrap="square" lIns="45720" tIns="27432" rIns="45720" bIns="27432"/>
           <a:lstStyle/>
           <a:p>
             <a:pPr algn="ctr"/>
@@ -12015,7 +11652,7 @@
           <a:noFill/>
         </p:spPr>
         <p:txBody>
-          <a:bodyPr wrap="square" lIns="0" tIns="0" rIns="0" bIns="0" anchor="t">
+          <a:bodyPr wrap="square" anchor="t" lIns="0" tIns="0" rIns="0" bIns="0">
             <a:spAutoFit/>
           </a:bodyPr>
           <a:lstStyle/>
@@ -12050,7 +11687,7 @@
           <a:noFill/>
         </p:spPr>
         <p:txBody>
-          <a:bodyPr wrap="square" lIns="0" tIns="0" rIns="0" bIns="0" anchor="t">
+          <a:bodyPr wrap="square" anchor="t" lIns="0" tIns="0" rIns="0" bIns="0">
             <a:spAutoFit/>
           </a:bodyPr>
           <a:lstStyle/>
@@ -12085,7 +11722,7 @@
           <a:noFill/>
         </p:spPr>
         <p:txBody>
-          <a:bodyPr wrap="square" lIns="0" tIns="0" rIns="0" bIns="0" anchor="t">
+          <a:bodyPr wrap="square" anchor="t" lIns="0" tIns="0" rIns="0" bIns="0">
             <a:spAutoFit/>
           </a:bodyPr>
           <a:lstStyle/>
@@ -12120,7 +11757,7 @@
           <a:noFill/>
         </p:spPr>
         <p:txBody>
-          <a:bodyPr wrap="square" lIns="0" tIns="0" rIns="0" bIns="0" anchor="t">
+          <a:bodyPr wrap="square" anchor="t" lIns="0" tIns="0" rIns="0" bIns="0">
             <a:spAutoFit/>
           </a:bodyPr>
           <a:lstStyle/>
@@ -12177,7 +11814,7 @@
           </a:fontRef>
         </p:style>
         <p:txBody>
-          <a:bodyPr wrap="square" lIns="27432" tIns="18288" rIns="27432" bIns="18288" rtlCol="0" anchor="ctr"/>
+          <a:bodyPr rtlCol="0" anchor="ctr" wrap="square" lIns="27432" tIns="18288" rIns="27432" bIns="18288"/>
           <a:lstStyle/>
           <a:p>
             <a:pPr algn="ctr"/>
@@ -12244,7 +11881,7 @@
           </a:fontRef>
         </p:style>
         <p:txBody>
-          <a:bodyPr wrap="square" lIns="27432" tIns="18288" rIns="27432" bIns="18288" rtlCol="0" anchor="ctr"/>
+          <a:bodyPr rtlCol="0" anchor="ctr" wrap="square" lIns="27432" tIns="18288" rIns="27432" bIns="18288"/>
           <a:lstStyle/>
           <a:p>
             <a:pPr algn="ctr"/>
@@ -12311,7 +11948,7 @@
           </a:fontRef>
         </p:style>
         <p:txBody>
-          <a:bodyPr wrap="square" lIns="27432" tIns="18288" rIns="27432" bIns="18288" rtlCol="0" anchor="ctr"/>
+          <a:bodyPr rtlCol="0" anchor="ctr" wrap="square" lIns="27432" tIns="18288" rIns="27432" bIns="18288"/>
           <a:lstStyle/>
           <a:p>
             <a:pPr algn="ctr"/>
@@ -12378,7 +12015,7 @@
           </a:fontRef>
         </p:style>
         <p:txBody>
-          <a:bodyPr wrap="square" lIns="27432" tIns="18288" rIns="27432" bIns="18288" rtlCol="0" anchor="ctr"/>
+          <a:bodyPr rtlCol="0" anchor="ctr" wrap="square" lIns="27432" tIns="18288" rIns="27432" bIns="18288"/>
           <a:lstStyle/>
           <a:p>
             <a:pPr algn="ctr"/>
@@ -12423,7 +12060,7 @@
           <a:noFill/>
         </p:spPr>
         <p:txBody>
-          <a:bodyPr wrap="square" lIns="0" tIns="0" rIns="0" bIns="0" anchor="ctr">
+          <a:bodyPr wrap="square" anchor="ctr" lIns="0" tIns="0" rIns="0" bIns="0">
             <a:spAutoFit/>
           </a:bodyPr>
           <a:lstStyle/>
@@ -12470,7 +12107,7 @@
           <a:noFill/>
         </p:spPr>
         <p:txBody>
-          <a:bodyPr wrap="square" lIns="0" tIns="0" rIns="0" bIns="0" anchor="ctr">
+          <a:bodyPr wrap="square" anchor="ctr" lIns="0" tIns="0" rIns="0" bIns="0">
             <a:spAutoFit/>
           </a:bodyPr>
           <a:lstStyle/>
@@ -12517,7 +12154,7 @@
           <a:noFill/>
         </p:spPr>
         <p:txBody>
-          <a:bodyPr wrap="square" lIns="0" tIns="0" rIns="0" bIns="0" anchor="t">
+          <a:bodyPr wrap="square" anchor="t" lIns="0" tIns="0" rIns="0" bIns="0">
             <a:spAutoFit/>
           </a:bodyPr>
           <a:lstStyle/>
@@ -12549,7 +12186,7 @@
         </p:xfrm>
         <a:graphic>
           <a:graphicData uri="http://schemas.openxmlformats.org/drawingml/2006/chart">
-            <c:chart xmlns:c="http://schemas.openxmlformats.org/drawingml/2006/chart" xmlns:r="http://schemas.openxmlformats.org/officeDocument/2006/relationships" r:id="rId3"/>
+            <c:chart xmlns:c="http://schemas.openxmlformats.org/drawingml/2006/chart" r:id="rId2"/>
           </a:graphicData>
         </a:graphic>
       </p:graphicFrame>
@@ -12570,7 +12207,7 @@
           <a:noFill/>
         </p:spPr>
         <p:txBody>
-          <a:bodyPr wrap="square" lIns="0" tIns="0" rIns="0" bIns="0" anchor="t">
+          <a:bodyPr wrap="square" anchor="t" lIns="0" tIns="0" rIns="0" bIns="0">
             <a:spAutoFit/>
           </a:bodyPr>
           <a:lstStyle/>
@@ -12605,7 +12242,7 @@
           <a:noFill/>
         </p:spPr>
         <p:txBody>
-          <a:bodyPr wrap="square" lIns="0" tIns="0" rIns="0" bIns="0" anchor="t">
+          <a:bodyPr wrap="square" anchor="t" lIns="0" tIns="0" rIns="0" bIns="0">
             <a:spAutoFit/>
           </a:bodyPr>
           <a:lstStyle/>
@@ -12637,7 +12274,7 @@
         </p:xfrm>
         <a:graphic>
           <a:graphicData uri="http://schemas.openxmlformats.org/drawingml/2006/chart">
-            <c:chart xmlns:c="http://schemas.openxmlformats.org/drawingml/2006/chart" xmlns:r="http://schemas.openxmlformats.org/officeDocument/2006/relationships" r:id="rId4"/>
+            <c:chart xmlns:c="http://schemas.openxmlformats.org/drawingml/2006/chart" r:id="rId3"/>
           </a:graphicData>
         </a:graphic>
       </p:graphicFrame>
@@ -12658,7 +12295,7 @@
           <a:noFill/>
         </p:spPr>
         <p:txBody>
-          <a:bodyPr wrap="square" lIns="0" tIns="0" rIns="0" bIns="0" anchor="t">
+          <a:bodyPr wrap="square" anchor="t" lIns="0" tIns="0" rIns="0" bIns="0">
             <a:spAutoFit/>
           </a:bodyPr>
           <a:lstStyle/>
@@ -12715,7 +12352,7 @@
           </a:fontRef>
         </p:style>
         <p:txBody>
-          <a:bodyPr wrap="square" lIns="137160" tIns="36576" rIns="137160" bIns="36576" rtlCol="0" anchor="ctr"/>
+          <a:bodyPr rtlCol="0" anchor="ctr" wrap="square" lIns="137160" tIns="36576" rIns="137160" bIns="36576"/>
           <a:lstStyle/>
           <a:p>
             <a:pPr algn="l"/>
@@ -12735,7 +12372,7 @@
                 </a:solidFill>
                 <a:latin typeface="Times New Roman"/>
               </a:rPr>
-              <a:t>accuracy (92.0%) is below the 93.3% of always answering â€œnoâ€, so PR-AUC and recall carry the result. Five-fold cross-validation agrees: ROC-AUC 0.8632 Â± 0.0053. </a:t>
+              <a:t>accuracy (92.0%) is below the 93.3% of always answering “no”, so PR-AUC and recall carry the result. Five-fold cross-validation agrees: ROC-AUC 0.8632 ± 0.0053. </a:t>
             </a:r>
             <a:r>
               <a:rPr sz="1250" b="1" i="0">

--- a/dev/deck/Loan_Default_Prediction_Seminar.pptx
+++ b/dev/deck/Loan_Default_Prediction_Seminar.pptx
@@ -5566,7 +5566,7 @@
                 </a:solidFill>
                 <a:latin typeface="Book Antiqua"/>
               </a:rPr>
-              <a:t>Faculty: Prof. Neeraj Sathwale</a:t>
+              <a:t>Faculty: Prof. Neeraj Sathawane</a:t>
             </a:r>
           </a:p>
           <a:p>
